--- a/2024/2024-03-22-AI-Updates.pptx
+++ b/2024/2024-03-22-AI-Updates.pptx
@@ -976,7 +976,7 @@
   <p:cSld>
     <p:spTree>
       <p:nvGrpSpPr>
-        <p:cNvPr id="1" name="Shape 135"/>
+        <p:cNvPr id="1" name="Shape 136"/>
         <p:cNvGrpSpPr/>
         <p:nvPr/>
       </p:nvGrpSpPr>
@@ -990,7 +990,7 @@
       </p:grpSpPr>
       <p:sp>
         <p:nvSpPr>
-          <p:cNvPr id="136" name="Google Shape;136;g2c565bbd142_1_5:notes"/>
+          <p:cNvPr id="137" name="Google Shape;137;g2c565bbd142_1_5:notes"/>
           <p:cNvSpPr>
             <a:spLocks noGrp="1" noRot="1" noChangeAspect="1"/>
           </p:cNvSpPr>
@@ -1041,7 +1041,7 @@
       </p:sp>
       <p:sp>
         <p:nvSpPr>
-          <p:cNvPr id="137" name="Google Shape;137;g2c565bbd142_1_5:notes"/>
+          <p:cNvPr id="138" name="Google Shape;138;g2c565bbd142_1_5:notes"/>
           <p:cNvSpPr txBox="1">
             <a:spLocks noGrp="1"/>
           </p:cNvSpPr>
@@ -1098,7 +1098,7 @@
   <p:cSld>
     <p:spTree>
       <p:nvGrpSpPr>
-        <p:cNvPr id="1" name="Shape 146"/>
+        <p:cNvPr id="1" name="Shape 148"/>
         <p:cNvGrpSpPr/>
         <p:nvPr/>
       </p:nvGrpSpPr>
@@ -1112,7 +1112,7 @@
       </p:grpSpPr>
       <p:sp>
         <p:nvSpPr>
-          <p:cNvPr id="147" name="Google Shape;147;g2c429e85adb_1_0:notes"/>
+          <p:cNvPr id="149" name="Google Shape;149;g2c429e85adb_1_0:notes"/>
           <p:cNvSpPr>
             <a:spLocks noGrp="1" noRot="1" noChangeAspect="1"/>
           </p:cNvSpPr>
@@ -1163,7 +1163,7 @@
       </p:sp>
       <p:sp>
         <p:nvSpPr>
-          <p:cNvPr id="148" name="Google Shape;148;g2c429e85adb_1_0:notes"/>
+          <p:cNvPr id="150" name="Google Shape;150;g2c429e85adb_1_0:notes"/>
           <p:cNvSpPr txBox="1">
             <a:spLocks noGrp="1"/>
           </p:cNvSpPr>
@@ -1220,7 +1220,7 @@
   <p:cSld>
     <p:spTree>
       <p:nvGrpSpPr>
-        <p:cNvPr id="1" name="Shape 154"/>
+        <p:cNvPr id="1" name="Shape 156"/>
         <p:cNvGrpSpPr/>
         <p:nvPr/>
       </p:nvGrpSpPr>
@@ -1234,7 +1234,7 @@
       </p:grpSpPr>
       <p:sp>
         <p:nvSpPr>
-          <p:cNvPr id="155" name="Google Shape;155;g2c448cc6a8b_0_0:notes"/>
+          <p:cNvPr id="157" name="Google Shape;157;g2c448cc6a8b_0_0:notes"/>
           <p:cNvSpPr>
             <a:spLocks noGrp="1" noRot="1" noChangeAspect="1"/>
           </p:cNvSpPr>
@@ -1285,7 +1285,7 @@
       </p:sp>
       <p:sp>
         <p:nvSpPr>
-          <p:cNvPr id="156" name="Google Shape;156;g2c448cc6a8b_0_0:notes"/>
+          <p:cNvPr id="158" name="Google Shape;158;g2c448cc6a8b_0_0:notes"/>
           <p:cNvSpPr txBox="1">
             <a:spLocks noGrp="1"/>
           </p:cNvSpPr>
@@ -1342,7 +1342,7 @@
   <p:cSld>
     <p:spTree>
       <p:nvGrpSpPr>
-        <p:cNvPr id="1" name="Shape 162"/>
+        <p:cNvPr id="1" name="Shape 164"/>
         <p:cNvGrpSpPr/>
         <p:nvPr/>
       </p:nvGrpSpPr>
@@ -1356,7 +1356,7 @@
       </p:grpSpPr>
       <p:sp>
         <p:nvSpPr>
-          <p:cNvPr id="163" name="Google Shape;163;g2c3bbb2fc7e_0_0:notes"/>
+          <p:cNvPr id="165" name="Google Shape;165;g2c3bbb2fc7e_0_0:notes"/>
           <p:cNvSpPr>
             <a:spLocks noGrp="1" noRot="1" noChangeAspect="1"/>
           </p:cNvSpPr>
@@ -1407,7 +1407,7 @@
       </p:sp>
       <p:sp>
         <p:nvSpPr>
-          <p:cNvPr id="164" name="Google Shape;164;g2c3bbb2fc7e_0_0:notes"/>
+          <p:cNvPr id="166" name="Google Shape;166;g2c3bbb2fc7e_0_0:notes"/>
           <p:cNvSpPr txBox="1">
             <a:spLocks noGrp="1"/>
           </p:cNvSpPr>
@@ -1464,7 +1464,7 @@
   <p:cSld>
     <p:spTree>
       <p:nvGrpSpPr>
-        <p:cNvPr id="1" name="Shape 171"/>
+        <p:cNvPr id="1" name="Shape 173"/>
         <p:cNvGrpSpPr/>
         <p:nvPr/>
       </p:nvGrpSpPr>
@@ -1478,7 +1478,7 @@
       </p:grpSpPr>
       <p:sp>
         <p:nvSpPr>
-          <p:cNvPr id="172" name="Google Shape;172;g2c565bbd142_0_3:notes"/>
+          <p:cNvPr id="174" name="Google Shape;174;g2c565bbd142_0_3:notes"/>
           <p:cNvSpPr>
             <a:spLocks noGrp="1" noRot="1" noChangeAspect="1"/>
           </p:cNvSpPr>
@@ -1519,7 +1519,7 @@
       </p:sp>
       <p:sp>
         <p:nvSpPr>
-          <p:cNvPr id="173" name="Google Shape;173;g2c565bbd142_0_3:notes"/>
+          <p:cNvPr id="175" name="Google Shape;175;g2c565bbd142_0_3:notes"/>
           <p:cNvSpPr txBox="1">
             <a:spLocks noGrp="1"/>
           </p:cNvSpPr>
@@ -1568,7 +1568,7 @@
   <p:cSld>
     <p:spTree>
       <p:nvGrpSpPr>
-        <p:cNvPr id="1" name="Shape 179"/>
+        <p:cNvPr id="1" name="Shape 181"/>
         <p:cNvGrpSpPr/>
         <p:nvPr/>
       </p:nvGrpSpPr>
@@ -1582,7 +1582,7 @@
       </p:grpSpPr>
       <p:sp>
         <p:nvSpPr>
-          <p:cNvPr id="180" name="Google Shape;180;p15:notes"/>
+          <p:cNvPr id="182" name="Google Shape;182;p15:notes"/>
           <p:cNvSpPr>
             <a:spLocks noGrp="1" noRot="1" noChangeAspect="1"/>
           </p:cNvSpPr>
@@ -1633,7 +1633,7 @@
       </p:sp>
       <p:sp>
         <p:nvSpPr>
-          <p:cNvPr id="181" name="Google Shape;181;p15:notes"/>
+          <p:cNvPr id="183" name="Google Shape;183;p15:notes"/>
           <p:cNvSpPr txBox="1">
             <a:spLocks noGrp="1"/>
           </p:cNvSpPr>
@@ -1690,7 +1690,7 @@
   <p:cSld>
     <p:spTree>
       <p:nvGrpSpPr>
-        <p:cNvPr id="1" name="Shape 192"/>
+        <p:cNvPr id="1" name="Shape 194"/>
         <p:cNvGrpSpPr/>
         <p:nvPr/>
       </p:nvGrpSpPr>
@@ -1704,7 +1704,7 @@
       </p:grpSpPr>
       <p:sp>
         <p:nvSpPr>
-          <p:cNvPr id="193" name="Google Shape;193;p16:notes"/>
+          <p:cNvPr id="195" name="Google Shape;195;p16:notes"/>
           <p:cNvSpPr>
             <a:spLocks noGrp="1" noRot="1" noChangeAspect="1"/>
           </p:cNvSpPr>
@@ -1755,7 +1755,7 @@
       </p:sp>
       <p:sp>
         <p:nvSpPr>
-          <p:cNvPr id="194" name="Google Shape;194;p16:notes"/>
+          <p:cNvPr id="196" name="Google Shape;196;p16:notes"/>
           <p:cNvSpPr txBox="1">
             <a:spLocks noGrp="1"/>
           </p:cNvSpPr>
@@ -1812,7 +1812,7 @@
   <p:cSld>
     <p:spTree>
       <p:nvGrpSpPr>
-        <p:cNvPr id="1" name="Shape 200"/>
+        <p:cNvPr id="1" name="Shape 202"/>
         <p:cNvGrpSpPr/>
         <p:nvPr/>
       </p:nvGrpSpPr>
@@ -1826,7 +1826,7 @@
       </p:grpSpPr>
       <p:sp>
         <p:nvSpPr>
-          <p:cNvPr id="201" name="Google Shape;201;p2:notes"/>
+          <p:cNvPr id="203" name="Google Shape;203;p2:notes"/>
           <p:cNvSpPr>
             <a:spLocks noGrp="1" noRot="1" noChangeAspect="1"/>
           </p:cNvSpPr>
@@ -1877,7 +1877,7 @@
       </p:sp>
       <p:sp>
         <p:nvSpPr>
-          <p:cNvPr id="202" name="Google Shape;202;p2:notes"/>
+          <p:cNvPr id="204" name="Google Shape;204;p2:notes"/>
           <p:cNvSpPr txBox="1">
             <a:spLocks noGrp="1"/>
           </p:cNvSpPr>
@@ -1934,7 +1934,7 @@
   <p:cSld>
     <p:spTree>
       <p:nvGrpSpPr>
-        <p:cNvPr id="1" name="Shape 210"/>
+        <p:cNvPr id="1" name="Shape 212"/>
         <p:cNvGrpSpPr/>
         <p:nvPr/>
       </p:nvGrpSpPr>
@@ -1948,7 +1948,7 @@
       </p:grpSpPr>
       <p:sp>
         <p:nvSpPr>
-          <p:cNvPr id="211" name="Google Shape;211;p17:notes"/>
+          <p:cNvPr id="213" name="Google Shape;213;p17:notes"/>
           <p:cNvSpPr>
             <a:spLocks noGrp="1" noRot="1" noChangeAspect="1"/>
           </p:cNvSpPr>
@@ -1999,7 +1999,7 @@
       </p:sp>
       <p:sp>
         <p:nvSpPr>
-          <p:cNvPr id="212" name="Google Shape;212;p17:notes"/>
+          <p:cNvPr id="214" name="Google Shape;214;p17:notes"/>
           <p:cNvSpPr txBox="1">
             <a:spLocks noGrp="1"/>
           </p:cNvSpPr>
@@ -10778,7 +10778,7 @@
         <p:spPr>
           <a:xfrm>
             <a:off x="86325" y="1127825"/>
-            <a:ext cx="4420200" cy="3648000"/>
+            <a:ext cx="4420200" cy="3879000"/>
           </a:xfrm>
           <a:prstGeom prst="rect">
             <a:avLst/>
@@ -11225,7 +11225,38 @@
                   <a:srgbClr val="3C78D8"/>
                 </a:solidFill>
               </a:rPr>
-              <a:t>Google partners with Samsung and Apple to bring Gemini to mobile phones</a:t>
+              <a:t>Google partners with Samsung and Apple to bring Gemini to mobile phones </a:t>
+            </a:r>
+            <a:endParaRPr sz="1500" b="1">
+              <a:solidFill>
+                <a:srgbClr val="3C78D8"/>
+              </a:solidFill>
+            </a:endParaRPr>
+          </a:p>
+          <a:p>
+            <a:pPr marL="228600" marR="0" lvl="0" indent="-209550" algn="l" rtl="0">
+              <a:lnSpc>
+                <a:spcPct val="100000"/>
+              </a:lnSpc>
+              <a:spcBef>
+                <a:spcPts val="0"/>
+              </a:spcBef>
+              <a:spcAft>
+                <a:spcPts val="0"/>
+              </a:spcAft>
+              <a:buClr>
+                <a:srgbClr val="3C78D8"/>
+              </a:buClr>
+              <a:buSzPts val="1500"/>
+              <a:buChar char="●"/>
+            </a:pPr>
+            <a:r>
+              <a:rPr lang="en" sz="1500" b="1">
+                <a:solidFill>
+                  <a:srgbClr val="3C78D8"/>
+                </a:solidFill>
+              </a:rPr>
+              <a:t>Google  - Gemini 1.5 Pro API is available</a:t>
             </a:r>
             <a:endParaRPr sz="1500" b="1">
               <a:solidFill>
@@ -11244,7 +11275,7 @@
         <p:spPr>
           <a:xfrm>
             <a:off x="4627375" y="1127825"/>
-            <a:ext cx="4420200" cy="3186300"/>
+            <a:ext cx="4420200" cy="3417000"/>
           </a:xfrm>
           <a:prstGeom prst="rect">
             <a:avLst/>
@@ -11443,7 +11474,38 @@
                   <a:srgbClr val="3C78D8"/>
                 </a:solidFill>
               </a:rPr>
-              <a:t>Neuralink paralized patient controls computer with his mind</a:t>
+              <a:t>Neuralink paralized patient controls computer with his mind </a:t>
+            </a:r>
+            <a:endParaRPr sz="1500" b="1">
+              <a:solidFill>
+                <a:srgbClr val="3C78D8"/>
+              </a:solidFill>
+            </a:endParaRPr>
+          </a:p>
+          <a:p>
+            <a:pPr marL="228600" marR="0" lvl="0" indent="-209550" algn="l" rtl="0">
+              <a:lnSpc>
+                <a:spcPct val="100000"/>
+              </a:lnSpc>
+              <a:spcBef>
+                <a:spcPts val="0"/>
+              </a:spcBef>
+              <a:spcAft>
+                <a:spcPts val="0"/>
+              </a:spcAft>
+              <a:buClr>
+                <a:srgbClr val="3C78D8"/>
+              </a:buClr>
+              <a:buSzPts val="1500"/>
+              <a:buChar char="●"/>
+            </a:pPr>
+            <a:r>
+              <a:rPr lang="en" sz="1500" b="1">
+                <a:solidFill>
+                  <a:srgbClr val="3C78D8"/>
+                </a:solidFill>
+              </a:rPr>
+              <a:t>maisa.ai - Mesa KPU</a:t>
             </a:r>
             <a:endParaRPr sz="1500" b="1">
               <a:solidFill>
@@ -11778,7 +11840,7 @@
   <p:cSld>
     <p:spTree>
       <p:nvGrpSpPr>
-        <p:cNvPr id="1" name="Shape 138"/>
+        <p:cNvPr id="1" name="Shape 139"/>
         <p:cNvGrpSpPr/>
         <p:nvPr/>
       </p:nvGrpSpPr>
@@ -11792,7 +11854,7 @@
       </p:grpSpPr>
       <p:sp>
         <p:nvSpPr>
-          <p:cNvPr id="139" name="Google Shape;139;p22"/>
+          <p:cNvPr id="140" name="Google Shape;140;p22"/>
           <p:cNvSpPr txBox="1"/>
           <p:nvPr/>
         </p:nvSpPr>
@@ -11858,7 +11920,7 @@
       </p:sp>
       <p:sp>
         <p:nvSpPr>
-          <p:cNvPr id="140" name="Google Shape;140;p22"/>
+          <p:cNvPr id="141" name="Google Shape;141;p22"/>
           <p:cNvSpPr txBox="1"/>
           <p:nvPr/>
         </p:nvSpPr>
@@ -12091,7 +12153,7 @@
       </p:sp>
       <p:sp>
         <p:nvSpPr>
-          <p:cNvPr id="141" name="Google Shape;141;p22"/>
+          <p:cNvPr id="142" name="Google Shape;142;p22"/>
           <p:cNvSpPr txBox="1"/>
           <p:nvPr/>
         </p:nvSpPr>
@@ -12217,7 +12279,7 @@
       </p:sp>
       <p:sp>
         <p:nvSpPr>
-          <p:cNvPr id="142" name="Google Shape;142;p22"/>
+          <p:cNvPr id="143" name="Google Shape;143;p22"/>
           <p:cNvSpPr txBox="1"/>
           <p:nvPr/>
         </p:nvSpPr>
@@ -12887,14 +12949,14 @@
       </p:sp>
       <p:sp>
         <p:nvSpPr>
-          <p:cNvPr id="143" name="Google Shape;143;p22"/>
+          <p:cNvPr id="144" name="Google Shape;144;p22"/>
           <p:cNvSpPr txBox="1"/>
           <p:nvPr/>
         </p:nvSpPr>
         <p:spPr>
           <a:xfrm>
-            <a:off x="4645475" y="2416000"/>
-            <a:ext cx="4385700" cy="837300"/>
+            <a:off x="4645475" y="1958800"/>
+            <a:ext cx="4385700" cy="637200"/>
           </a:xfrm>
           <a:prstGeom prst="rect">
             <a:avLst/>
@@ -12969,7 +13031,7 @@
                 <a:cs typeface="Calibri"/>
                 <a:sym typeface="Calibri"/>
               </a:rPr>
-              <a:t>Paralized patient controls computer with his mind - playing games like chess. </a:t>
+              <a:t>Paralized patient plays chess on computer with his mind</a:t>
             </a:r>
             <a:endParaRPr sz="1300">
               <a:solidFill>
@@ -13030,7 +13092,7 @@
       </p:sp>
       <p:pic>
         <p:nvPicPr>
-          <p:cNvPr id="144" name="Google Shape;144;p22"/>
+          <p:cNvPr id="145" name="Google Shape;145;p22"/>
           <p:cNvPicPr preferRelativeResize="0"/>
           <p:nvPr/>
         </p:nvPicPr>
@@ -13049,8 +13111,8 @@
         </p:blipFill>
         <p:spPr>
           <a:xfrm>
-            <a:off x="5503976" y="161475"/>
-            <a:ext cx="2434376" cy="2209525"/>
+            <a:off x="5951550" y="161475"/>
+            <a:ext cx="1986801" cy="1803299"/>
           </a:xfrm>
           <a:prstGeom prst="rect">
             <a:avLst/>
@@ -13063,13 +13125,13 @@
       </p:pic>
       <p:sp>
         <p:nvSpPr>
-          <p:cNvPr id="145" name="Google Shape;145;p22"/>
+          <p:cNvPr id="146" name="Google Shape;146;p22"/>
           <p:cNvSpPr txBox="1"/>
           <p:nvPr/>
         </p:nvSpPr>
         <p:spPr>
           <a:xfrm>
-            <a:off x="4645475" y="3326800"/>
+            <a:off x="4645475" y="4216850"/>
             <a:ext cx="4385700" cy="514200"/>
           </a:xfrm>
           <a:prstGeom prst="rect">
@@ -13177,6 +13239,276 @@
           </a:p>
         </p:txBody>
       </p:sp>
+      <p:sp>
+        <p:nvSpPr>
+          <p:cNvPr id="147" name="Google Shape;147;p22"/>
+          <p:cNvSpPr txBox="1"/>
+          <p:nvPr/>
+        </p:nvSpPr>
+        <p:spPr>
+          <a:xfrm>
+            <a:off x="4645475" y="2687625"/>
+            <a:ext cx="4385700" cy="1437600"/>
+          </a:xfrm>
+          <a:prstGeom prst="rect">
+            <a:avLst/>
+          </a:prstGeom>
+          <a:solidFill>
+            <a:srgbClr val="FFF2CC"/>
+          </a:solidFill>
+          <a:ln w="9525" cap="flat" cmpd="sng">
+            <a:solidFill>
+              <a:srgbClr val="FF0000"/>
+            </a:solidFill>
+            <a:prstDash val="solid"/>
+            <a:round/>
+            <a:headEnd type="none" w="sm" len="sm"/>
+            <a:tailEnd type="none" w="sm" len="sm"/>
+          </a:ln>
+        </p:spPr>
+        <p:txBody>
+          <a:bodyPr spcFirstLastPara="1" wrap="square" lIns="18275" tIns="18275" rIns="18275" bIns="18275" anchor="t" anchorCtr="0">
+            <a:spAutoFit/>
+          </a:bodyPr>
+          <a:lstStyle/>
+          <a:p>
+            <a:pPr marL="0" lvl="0" indent="0" algn="l" rtl="0">
+              <a:spcBef>
+                <a:spcPts val="0"/>
+              </a:spcBef>
+              <a:spcAft>
+                <a:spcPts val="0"/>
+              </a:spcAft>
+              <a:buClr>
+                <a:schemeClr val="dk1"/>
+              </a:buClr>
+              <a:buSzPts val="1100"/>
+              <a:buFont typeface="Arial"/>
+              <a:buNone/>
+            </a:pPr>
+            <a:r>
+              <a:rPr lang="en" sz="1300" b="1" u="sng">
+                <a:solidFill>
+                  <a:schemeClr val="hlink"/>
+                </a:solidFill>
+                <a:latin typeface="Calibri"/>
+                <a:ea typeface="Calibri"/>
+                <a:cs typeface="Calibri"/>
+                <a:sym typeface="Calibri"/>
+                <a:hlinkClick r:id="rId17"/>
+              </a:rPr>
+              <a:t>https://maisa.ai</a:t>
+            </a:r>
+            <a:r>
+              <a:rPr lang="en" sz="1300" b="1">
+                <a:solidFill>
+                  <a:srgbClr val="FF0000"/>
+                </a:solidFill>
+                <a:latin typeface="Calibri"/>
+                <a:ea typeface="Calibri"/>
+                <a:cs typeface="Calibri"/>
+                <a:sym typeface="Calibri"/>
+              </a:rPr>
+              <a:t> - Mesa KPU (Knowledge Processing Unit)</a:t>
+            </a:r>
+            <a:endParaRPr sz="1300" b="1">
+              <a:solidFill>
+                <a:srgbClr val="FF0000"/>
+              </a:solidFill>
+              <a:latin typeface="Calibri"/>
+              <a:ea typeface="Calibri"/>
+              <a:cs typeface="Calibri"/>
+              <a:sym typeface="Calibri"/>
+            </a:endParaRPr>
+          </a:p>
+          <a:p>
+            <a:pPr marL="0" lvl="0" indent="0" algn="l" rtl="0">
+              <a:spcBef>
+                <a:spcPts val="0"/>
+              </a:spcBef>
+              <a:spcAft>
+                <a:spcPts val="0"/>
+              </a:spcAft>
+              <a:buClr>
+                <a:schemeClr val="dk1"/>
+              </a:buClr>
+              <a:buSzPts val="1100"/>
+              <a:buFont typeface="Arial"/>
+              <a:buNone/>
+            </a:pPr>
+            <a:r>
+              <a:rPr lang="en" sz="1300" u="sng">
+                <a:solidFill>
+                  <a:schemeClr val="hlink"/>
+                </a:solidFill>
+                <a:latin typeface="Calibri"/>
+                <a:ea typeface="Calibri"/>
+                <a:cs typeface="Calibri"/>
+                <a:sym typeface="Calibri"/>
+                <a:hlinkClick r:id="rId18"/>
+              </a:rPr>
+              <a:t>https://www.linkedin.com/pulse/ai-reasoning-breakthrough-mesas-kpu-decimates-gpt-4-timmy-vanheel-lrq1e/</a:t>
+            </a:r>
+            <a:endParaRPr sz="1300">
+              <a:solidFill>
+                <a:schemeClr val="dk1"/>
+              </a:solidFill>
+              <a:latin typeface="Calibri"/>
+              <a:ea typeface="Calibri"/>
+              <a:cs typeface="Calibri"/>
+              <a:sym typeface="Calibri"/>
+            </a:endParaRPr>
+          </a:p>
+          <a:p>
+            <a:pPr marL="0" lvl="0" indent="0" algn="l" rtl="0">
+              <a:spcBef>
+                <a:spcPts val="0"/>
+              </a:spcBef>
+              <a:spcAft>
+                <a:spcPts val="0"/>
+              </a:spcAft>
+              <a:buClr>
+                <a:schemeClr val="dk1"/>
+              </a:buClr>
+              <a:buSzPts val="1100"/>
+              <a:buFont typeface="Arial"/>
+              <a:buNone/>
+            </a:pPr>
+            <a:r>
+              <a:rPr lang="en" sz="1300">
+                <a:solidFill>
+                  <a:schemeClr val="dk1"/>
+                </a:solidFill>
+                <a:latin typeface="Calibri"/>
+                <a:ea typeface="Calibri"/>
+                <a:cs typeface="Calibri"/>
+                <a:sym typeface="Calibri"/>
+              </a:rPr>
+              <a:t>Mesa claims the KPU achieved impressive results:</a:t>
+            </a:r>
+            <a:endParaRPr sz="1300">
+              <a:solidFill>
+                <a:schemeClr val="dk1"/>
+              </a:solidFill>
+              <a:latin typeface="Calibri"/>
+              <a:ea typeface="Calibri"/>
+              <a:cs typeface="Calibri"/>
+              <a:sym typeface="Calibri"/>
+            </a:endParaRPr>
+          </a:p>
+          <a:p>
+            <a:pPr marL="0" lvl="0" indent="0" algn="l" rtl="0">
+              <a:spcBef>
+                <a:spcPts val="0"/>
+              </a:spcBef>
+              <a:spcAft>
+                <a:spcPts val="0"/>
+              </a:spcAft>
+              <a:buClr>
+                <a:schemeClr val="dk1"/>
+              </a:buClr>
+              <a:buSzPts val="1100"/>
+              <a:buFont typeface="Arial"/>
+              <a:buNone/>
+            </a:pPr>
+            <a:r>
+              <a:rPr lang="en" sz="1300">
+                <a:solidFill>
+                  <a:schemeClr val="dk1"/>
+                </a:solidFill>
+                <a:latin typeface="Calibri"/>
+                <a:ea typeface="Calibri"/>
+                <a:cs typeface="Calibri"/>
+                <a:sym typeface="Calibri"/>
+              </a:rPr>
+              <a:t>96.9% accuracy (zero-shot) GSM8K (math word problems): </a:t>
+            </a:r>
+            <a:endParaRPr sz="1300">
+              <a:solidFill>
+                <a:schemeClr val="dk1"/>
+              </a:solidFill>
+              <a:latin typeface="Calibri"/>
+              <a:ea typeface="Calibri"/>
+              <a:cs typeface="Calibri"/>
+              <a:sym typeface="Calibri"/>
+            </a:endParaRPr>
+          </a:p>
+          <a:p>
+            <a:pPr marL="0" lvl="0" indent="0" algn="l" rtl="0">
+              <a:spcBef>
+                <a:spcPts val="0"/>
+              </a:spcBef>
+              <a:spcAft>
+                <a:spcPts val="0"/>
+              </a:spcAft>
+              <a:buClr>
+                <a:schemeClr val="dk1"/>
+              </a:buClr>
+              <a:buSzPts val="1100"/>
+              <a:buFont typeface="Arial"/>
+              <a:buNone/>
+            </a:pPr>
+            <a:r>
+              <a:rPr lang="en" sz="1300">
+                <a:solidFill>
+                  <a:schemeClr val="dk1"/>
+                </a:solidFill>
+                <a:latin typeface="Calibri"/>
+                <a:ea typeface="Calibri"/>
+                <a:cs typeface="Calibri"/>
+                <a:sym typeface="Calibri"/>
+              </a:rPr>
+              <a:t>86.2% accuracy (zero-shot) DROP (reading comprehension): </a:t>
+            </a:r>
+            <a:endParaRPr sz="1300">
+              <a:solidFill>
+                <a:schemeClr val="dk1"/>
+              </a:solidFill>
+              <a:latin typeface="Calibri"/>
+              <a:ea typeface="Calibri"/>
+              <a:cs typeface="Calibri"/>
+              <a:sym typeface="Calibri"/>
+            </a:endParaRPr>
+          </a:p>
+          <a:p>
+            <a:pPr marL="0" lvl="0" indent="0" algn="l" rtl="0">
+              <a:spcBef>
+                <a:spcPts val="0"/>
+              </a:spcBef>
+              <a:spcAft>
+                <a:spcPts val="0"/>
+              </a:spcAft>
+              <a:buClr>
+                <a:schemeClr val="dk1"/>
+              </a:buClr>
+              <a:buSzPts val="1100"/>
+              <a:buFont typeface="Arial"/>
+              <a:buNone/>
+            </a:pPr>
+            <a:r>
+              <a:rPr lang="en" sz="1300">
+                <a:solidFill>
+                  <a:schemeClr val="dk1"/>
+                </a:solidFill>
+                <a:latin typeface="Calibri"/>
+                <a:ea typeface="Calibri"/>
+                <a:cs typeface="Calibri"/>
+                <a:sym typeface="Calibri"/>
+              </a:rPr>
+              <a:t>100% on multi-step arithmetic problems (vs 4% for GPT-4)</a:t>
+            </a:r>
+            <a:endParaRPr sz="1300">
+              <a:solidFill>
+                <a:schemeClr val="dk1"/>
+              </a:solidFill>
+              <a:latin typeface="Calibri"/>
+              <a:ea typeface="Calibri"/>
+              <a:cs typeface="Calibri"/>
+              <a:sym typeface="Calibri"/>
+            </a:endParaRPr>
+          </a:p>
+        </p:txBody>
+      </p:sp>
     </p:spTree>
   </p:cSld>
   <p:clrMapOvr>
@@ -13190,7 +13522,7 @@
   <p:cSld>
     <p:spTree>
       <p:nvGrpSpPr>
-        <p:cNvPr id="1" name="Shape 149"/>
+        <p:cNvPr id="1" name="Shape 151"/>
         <p:cNvGrpSpPr/>
         <p:nvPr/>
       </p:nvGrpSpPr>
@@ -13204,7 +13536,7 @@
       </p:grpSpPr>
       <p:sp>
         <p:nvSpPr>
-          <p:cNvPr id="150" name="Google Shape;150;p23"/>
+          <p:cNvPr id="152" name="Google Shape;152;p23"/>
           <p:cNvSpPr txBox="1"/>
           <p:nvPr/>
         </p:nvSpPr>
@@ -13270,7 +13602,7 @@
       </p:sp>
       <p:sp>
         <p:nvSpPr>
-          <p:cNvPr id="151" name="Google Shape;151;p23"/>
+          <p:cNvPr id="153" name="Google Shape;153;p23"/>
           <p:cNvSpPr txBox="1"/>
           <p:nvPr/>
         </p:nvSpPr>
@@ -13584,7 +13916,7 @@
       </p:sp>
       <p:sp>
         <p:nvSpPr>
-          <p:cNvPr id="152" name="Google Shape;152;p23"/>
+          <p:cNvPr id="154" name="Google Shape;154;p23"/>
           <p:cNvSpPr txBox="1"/>
           <p:nvPr/>
         </p:nvSpPr>
@@ -13786,7 +14118,7 @@
       </p:sp>
       <p:pic>
         <p:nvPicPr>
-          <p:cNvPr id="153" name="Google Shape;153;p23"/>
+          <p:cNvPr id="155" name="Google Shape;155;p23"/>
           <p:cNvPicPr preferRelativeResize="0"/>
           <p:nvPr/>
         </p:nvPicPr>
@@ -13829,7 +14161,7 @@
   <p:cSld>
     <p:spTree>
       <p:nvGrpSpPr>
-        <p:cNvPr id="1" name="Shape 157"/>
+        <p:cNvPr id="1" name="Shape 159"/>
         <p:cNvGrpSpPr/>
         <p:nvPr/>
       </p:nvGrpSpPr>
@@ -13843,7 +14175,7 @@
       </p:grpSpPr>
       <p:sp>
         <p:nvSpPr>
-          <p:cNvPr id="158" name="Google Shape;158;p24"/>
+          <p:cNvPr id="160" name="Google Shape;160;p24"/>
           <p:cNvSpPr txBox="1"/>
           <p:nvPr/>
         </p:nvSpPr>
@@ -13904,7 +14236,7 @@
       </p:sp>
       <p:sp>
         <p:nvSpPr>
-          <p:cNvPr id="159" name="Google Shape;159;p24"/>
+          <p:cNvPr id="161" name="Google Shape;161;p24"/>
           <p:cNvSpPr txBox="1"/>
           <p:nvPr/>
         </p:nvSpPr>
@@ -14301,7 +14633,7 @@
       </p:sp>
       <p:pic>
         <p:nvPicPr>
-          <p:cNvPr id="160" name="Google Shape;160;p24"/>
+          <p:cNvPr id="162" name="Google Shape;162;p24"/>
           <p:cNvPicPr preferRelativeResize="0"/>
           <p:nvPr/>
         </p:nvPicPr>
@@ -14334,7 +14666,7 @@
       </p:pic>
       <p:sp>
         <p:nvSpPr>
-          <p:cNvPr id="161" name="Google Shape;161;p24"/>
+          <p:cNvPr id="163" name="Google Shape;163;p24"/>
           <p:cNvSpPr txBox="1"/>
           <p:nvPr/>
         </p:nvSpPr>
@@ -14648,7 +14980,7 @@
   <p:cSld>
     <p:spTree>
       <p:nvGrpSpPr>
-        <p:cNvPr id="1" name="Shape 165"/>
+        <p:cNvPr id="1" name="Shape 167"/>
         <p:cNvGrpSpPr/>
         <p:nvPr/>
       </p:nvGrpSpPr>
@@ -14662,7 +14994,7 @@
       </p:grpSpPr>
       <p:sp>
         <p:nvSpPr>
-          <p:cNvPr id="166" name="Google Shape;166;p25"/>
+          <p:cNvPr id="168" name="Google Shape;168;p25"/>
           <p:cNvSpPr txBox="1"/>
           <p:nvPr/>
         </p:nvSpPr>
@@ -14728,7 +15060,7 @@
       </p:sp>
       <p:sp>
         <p:nvSpPr>
-          <p:cNvPr id="167" name="Google Shape;167;p25"/>
+          <p:cNvPr id="169" name="Google Shape;169;p25"/>
           <p:cNvSpPr txBox="1"/>
           <p:nvPr/>
         </p:nvSpPr>
@@ -14861,7 +15193,7 @@
       </p:sp>
       <p:pic>
         <p:nvPicPr>
-          <p:cNvPr id="168" name="Google Shape;168;p25"/>
+          <p:cNvPr id="170" name="Google Shape;170;p25"/>
           <p:cNvPicPr preferRelativeResize="0"/>
           <p:nvPr/>
         </p:nvPicPr>
@@ -14894,7 +15226,7 @@
       </p:pic>
       <p:pic>
         <p:nvPicPr>
-          <p:cNvPr id="169" name="Google Shape;169;p25"/>
+          <p:cNvPr id="171" name="Google Shape;171;p25"/>
           <p:cNvPicPr preferRelativeResize="0"/>
           <p:nvPr/>
         </p:nvPicPr>
@@ -14927,7 +15259,7 @@
       </p:pic>
       <p:sp>
         <p:nvSpPr>
-          <p:cNvPr id="170" name="Google Shape;170;p25"/>
+          <p:cNvPr id="172" name="Google Shape;172;p25"/>
           <p:cNvSpPr txBox="1"/>
           <p:nvPr/>
         </p:nvSpPr>
@@ -15132,7 +15464,7 @@
   <p:cSld>
     <p:spTree>
       <p:nvGrpSpPr>
-        <p:cNvPr id="1" name="Shape 174"/>
+        <p:cNvPr id="1" name="Shape 176"/>
         <p:cNvGrpSpPr/>
         <p:nvPr/>
       </p:nvGrpSpPr>
@@ -15146,7 +15478,7 @@
       </p:grpSpPr>
       <p:sp>
         <p:nvSpPr>
-          <p:cNvPr id="175" name="Google Shape;175;p26"/>
+          <p:cNvPr id="177" name="Google Shape;177;p26"/>
           <p:cNvSpPr txBox="1"/>
           <p:nvPr/>
         </p:nvSpPr>
@@ -15201,7 +15533,7 @@
       </p:sp>
       <p:sp>
         <p:nvSpPr>
-          <p:cNvPr id="176" name="Google Shape;176;p26"/>
+          <p:cNvPr id="178" name="Google Shape;178;p26"/>
           <p:cNvSpPr txBox="1"/>
           <p:nvPr/>
         </p:nvSpPr>
@@ -15642,7 +15974,7 @@
       </p:sp>
       <p:pic>
         <p:nvPicPr>
-          <p:cNvPr id="177" name="Google Shape;177;p26"/>
+          <p:cNvPr id="179" name="Google Shape;179;p26"/>
           <p:cNvPicPr preferRelativeResize="0"/>
           <p:nvPr/>
         </p:nvPicPr>
@@ -15675,7 +16007,7 @@
       </p:pic>
       <p:sp>
         <p:nvSpPr>
-          <p:cNvPr id="178" name="Google Shape;178;p26"/>
+          <p:cNvPr id="180" name="Google Shape;180;p26"/>
           <p:cNvSpPr txBox="1"/>
           <p:nvPr/>
         </p:nvSpPr>
@@ -15933,7 +16265,7 @@
   <p:cSld>
     <p:spTree>
       <p:nvGrpSpPr>
-        <p:cNvPr id="1" name="Shape 182"/>
+        <p:cNvPr id="1" name="Shape 184"/>
         <p:cNvGrpSpPr/>
         <p:nvPr/>
       </p:nvGrpSpPr>
@@ -15947,7 +16279,7 @@
       </p:grpSpPr>
       <p:sp>
         <p:nvSpPr>
-          <p:cNvPr id="183" name="Google Shape;183;p27"/>
+          <p:cNvPr id="185" name="Google Shape;185;p27"/>
           <p:cNvSpPr txBox="1"/>
           <p:nvPr/>
         </p:nvSpPr>
@@ -16093,7 +16425,7 @@
       </p:sp>
       <p:sp>
         <p:nvSpPr>
-          <p:cNvPr id="184" name="Google Shape;184;p27"/>
+          <p:cNvPr id="186" name="Google Shape;186;p27"/>
           <p:cNvSpPr txBox="1"/>
           <p:nvPr/>
         </p:nvSpPr>
@@ -16207,7 +16539,7 @@
       </p:sp>
       <p:sp>
         <p:nvSpPr>
-          <p:cNvPr id="185" name="Google Shape;185;p27"/>
+          <p:cNvPr id="187" name="Google Shape;187;p27"/>
           <p:cNvSpPr txBox="1"/>
           <p:nvPr/>
         </p:nvSpPr>
@@ -16273,7 +16605,7 @@
       </p:sp>
       <p:sp>
         <p:nvSpPr>
-          <p:cNvPr id="186" name="Google Shape;186;p27"/>
+          <p:cNvPr id="188" name="Google Shape;188;p27"/>
           <p:cNvSpPr txBox="1"/>
           <p:nvPr/>
         </p:nvSpPr>
@@ -16352,7 +16684,7 @@
       </p:sp>
       <p:pic>
         <p:nvPicPr>
-          <p:cNvPr id="187" name="Google Shape;187;p27"/>
+          <p:cNvPr id="189" name="Google Shape;189;p27"/>
           <p:cNvPicPr preferRelativeResize="0"/>
           <p:nvPr/>
         </p:nvPicPr>
@@ -16385,7 +16717,7 @@
       </p:pic>
       <p:pic>
         <p:nvPicPr>
-          <p:cNvPr id="188" name="Google Shape;188;p27"/>
+          <p:cNvPr id="190" name="Google Shape;190;p27"/>
           <p:cNvPicPr preferRelativeResize="0"/>
           <p:nvPr/>
         </p:nvPicPr>
@@ -16417,7 +16749,7 @@
       </p:pic>
       <p:sp>
         <p:nvSpPr>
-          <p:cNvPr id="189" name="Google Shape;189;p27"/>
+          <p:cNvPr id="191" name="Google Shape;191;p27"/>
           <p:cNvSpPr txBox="1"/>
           <p:nvPr/>
         </p:nvSpPr>
@@ -16491,7 +16823,7 @@
       </p:sp>
       <p:sp>
         <p:nvSpPr>
-          <p:cNvPr id="190" name="Google Shape;190;p27"/>
+          <p:cNvPr id="192" name="Google Shape;192;p27"/>
           <p:cNvSpPr txBox="1"/>
           <p:nvPr/>
         </p:nvSpPr>
@@ -16565,7 +16897,7 @@
       </p:sp>
       <p:sp>
         <p:nvSpPr>
-          <p:cNvPr id="191" name="Google Shape;191;p27"/>
+          <p:cNvPr id="193" name="Google Shape;193;p27"/>
           <p:cNvSpPr txBox="1"/>
           <p:nvPr/>
         </p:nvSpPr>
@@ -16650,7 +16982,7 @@
   <p:cSld>
     <p:spTree>
       <p:nvGrpSpPr>
-        <p:cNvPr id="1" name="Shape 195"/>
+        <p:cNvPr id="1" name="Shape 197"/>
         <p:cNvGrpSpPr/>
         <p:nvPr/>
       </p:nvGrpSpPr>
@@ -16664,7 +16996,7 @@
       </p:grpSpPr>
       <p:sp>
         <p:nvSpPr>
-          <p:cNvPr id="196" name="Google Shape;196;p28"/>
+          <p:cNvPr id="198" name="Google Shape;198;p28"/>
           <p:cNvSpPr txBox="1"/>
           <p:nvPr/>
         </p:nvSpPr>
@@ -16742,7 +17074,7 @@
       </p:sp>
       <p:sp>
         <p:nvSpPr>
-          <p:cNvPr id="197" name="Google Shape;197;p28"/>
+          <p:cNvPr id="199" name="Google Shape;199;p28"/>
           <p:cNvSpPr txBox="1"/>
           <p:nvPr/>
         </p:nvSpPr>
@@ -16833,7 +17165,7 @@
       </p:sp>
       <p:pic>
         <p:nvPicPr>
-          <p:cNvPr id="198" name="Google Shape;198;p28"/>
+          <p:cNvPr id="200" name="Google Shape;200;p28"/>
           <p:cNvPicPr preferRelativeResize="0"/>
           <p:nvPr/>
         </p:nvPicPr>
@@ -16866,7 +17198,7 @@
       </p:pic>
       <p:sp>
         <p:nvSpPr>
-          <p:cNvPr id="199" name="Google Shape;199;p28"/>
+          <p:cNvPr id="201" name="Google Shape;201;p28"/>
           <p:cNvSpPr txBox="1"/>
           <p:nvPr/>
         </p:nvSpPr>
@@ -16961,7 +17293,7 @@
   <p:cSld>
     <p:spTree>
       <p:nvGrpSpPr>
-        <p:cNvPr id="1" name="Shape 203"/>
+        <p:cNvPr id="1" name="Shape 205"/>
         <p:cNvGrpSpPr/>
         <p:nvPr/>
       </p:nvGrpSpPr>
@@ -16975,7 +17307,7 @@
       </p:grpSpPr>
       <p:pic>
         <p:nvPicPr>
-          <p:cNvPr id="204" name="Google Shape;204;p29"/>
+          <p:cNvPr id="206" name="Google Shape;206;p29"/>
           <p:cNvPicPr preferRelativeResize="0"/>
           <p:nvPr/>
         </p:nvPicPr>
@@ -17002,7 +17334,7 @@
       </p:pic>
       <p:sp>
         <p:nvSpPr>
-          <p:cNvPr id="205" name="Google Shape;205;p29"/>
+          <p:cNvPr id="207" name="Google Shape;207;p29"/>
           <p:cNvSpPr txBox="1"/>
           <p:nvPr/>
         </p:nvSpPr>
@@ -17068,7 +17400,7 @@
       </p:sp>
       <p:sp>
         <p:nvSpPr>
-          <p:cNvPr id="206" name="Google Shape;206;p29"/>
+          <p:cNvPr id="208" name="Google Shape;208;p29"/>
           <p:cNvSpPr txBox="1"/>
           <p:nvPr/>
         </p:nvSpPr>
@@ -17498,7 +17830,7 @@
       </p:sp>
       <p:pic>
         <p:nvPicPr>
-          <p:cNvPr id="207" name="Google Shape;207;p29"/>
+          <p:cNvPr id="209" name="Google Shape;209;p29"/>
           <p:cNvPicPr preferRelativeResize="0"/>
           <p:nvPr/>
         </p:nvPicPr>
@@ -17530,7 +17862,7 @@
       </p:pic>
       <p:sp>
         <p:nvSpPr>
-          <p:cNvPr id="208" name="Google Shape;208;p29"/>
+          <p:cNvPr id="210" name="Google Shape;210;p29"/>
           <p:cNvSpPr txBox="1"/>
           <p:nvPr/>
         </p:nvSpPr>
@@ -17609,7 +17941,7 @@
       </p:sp>
       <p:sp>
         <p:nvSpPr>
-          <p:cNvPr id="209" name="Google Shape;209;p29"/>
+          <p:cNvPr id="211" name="Google Shape;211;p29"/>
           <p:cNvSpPr txBox="1"/>
           <p:nvPr/>
         </p:nvSpPr>
@@ -17686,7 +18018,7 @@
   <p:cSld>
     <p:spTree>
       <p:nvGrpSpPr>
-        <p:cNvPr id="1" name="Shape 213"/>
+        <p:cNvPr id="1" name="Shape 215"/>
         <p:cNvGrpSpPr/>
         <p:nvPr/>
       </p:nvGrpSpPr>
@@ -17700,7 +18032,7 @@
       </p:grpSpPr>
       <p:sp>
         <p:nvSpPr>
-          <p:cNvPr id="214" name="Google Shape;214;p30"/>
+          <p:cNvPr id="216" name="Google Shape;216;p30"/>
           <p:cNvSpPr txBox="1"/>
           <p:nvPr/>
         </p:nvSpPr>
@@ -25505,7 +25837,7 @@
         </p:nvSpPr>
         <p:spPr>
           <a:xfrm>
-            <a:off x="50183" y="1809214"/>
+            <a:off x="57953" y="2260141"/>
             <a:ext cx="4478700" cy="437100"/>
           </a:xfrm>
           <a:prstGeom prst="rect">
@@ -25612,7 +25944,7 @@
         </p:blipFill>
         <p:spPr>
           <a:xfrm>
-            <a:off x="81075" y="2398700"/>
+            <a:off x="49996" y="2742348"/>
             <a:ext cx="4478700" cy="2346495"/>
           </a:xfrm>
           <a:prstGeom prst="rect">
@@ -25936,6 +26268,108 @@
               <a:t>Mustafa Suleyman</a:t>
             </a:r>
             <a:endParaRPr sz="1300">
+              <a:latin typeface="Calibri"/>
+              <a:ea typeface="Calibri"/>
+              <a:cs typeface="Calibri"/>
+              <a:sym typeface="Calibri"/>
+            </a:endParaRPr>
+          </a:p>
+        </p:txBody>
+      </p:sp>
+      <p:sp>
+        <p:nvSpPr>
+          <p:cNvPr id="135" name="Google Shape;135;p21"/>
+          <p:cNvSpPr txBox="1"/>
+          <p:nvPr/>
+        </p:nvSpPr>
+        <p:spPr>
+          <a:xfrm>
+            <a:off x="50185" y="1809031"/>
+            <a:ext cx="4478700" cy="390900"/>
+          </a:xfrm>
+          <a:prstGeom prst="rect">
+            <a:avLst/>
+          </a:prstGeom>
+          <a:solidFill>
+            <a:srgbClr val="FFF2CC"/>
+          </a:solidFill>
+          <a:ln w="9525" cap="flat" cmpd="sng">
+            <a:solidFill>
+              <a:srgbClr val="FF0000"/>
+            </a:solidFill>
+            <a:prstDash val="solid"/>
+            <a:round/>
+            <a:headEnd type="none" w="sm" len="sm"/>
+            <a:tailEnd type="none" w="sm" len="sm"/>
+          </a:ln>
+        </p:spPr>
+        <p:txBody>
+          <a:bodyPr spcFirstLastPara="1" wrap="square" lIns="18275" tIns="18275" rIns="18275" bIns="18275" anchor="t" anchorCtr="0">
+            <a:spAutoFit/>
+          </a:bodyPr>
+          <a:lstStyle/>
+          <a:p>
+            <a:pPr marL="0" lvl="0" indent="0" algn="l" rtl="0">
+              <a:spcBef>
+                <a:spcPts val="0"/>
+              </a:spcBef>
+              <a:spcAft>
+                <a:spcPts val="0"/>
+              </a:spcAft>
+              <a:buNone/>
+            </a:pPr>
+            <a:r>
+              <a:rPr lang="en" sz="1300" b="1">
+                <a:solidFill>
+                  <a:srgbClr val="FF0000"/>
+                </a:solidFill>
+                <a:latin typeface="Calibri"/>
+                <a:ea typeface="Calibri"/>
+                <a:cs typeface="Calibri"/>
+                <a:sym typeface="Calibri"/>
+              </a:rPr>
+              <a:t>Google </a:t>
+            </a:r>
+            <a:r>
+              <a:rPr lang="en" sz="1300">
+                <a:latin typeface="Calibri"/>
+                <a:ea typeface="Calibri"/>
+                <a:cs typeface="Calibri"/>
+                <a:sym typeface="Calibri"/>
+              </a:rPr>
+              <a:t> - Gemini 1.5 Pro API is available</a:t>
+            </a:r>
+            <a:br>
+              <a:rPr lang="en" sz="1000">
+                <a:latin typeface="Calibri"/>
+                <a:ea typeface="Calibri"/>
+                <a:cs typeface="Calibri"/>
+                <a:sym typeface="Calibri"/>
+              </a:rPr>
+            </a:br>
+            <a:r>
+              <a:rPr lang="en" sz="1000" u="sng">
+                <a:solidFill>
+                  <a:schemeClr val="hlink"/>
+                </a:solidFill>
+                <a:latin typeface="Calibri"/>
+                <a:ea typeface="Calibri"/>
+                <a:cs typeface="Calibri"/>
+                <a:sym typeface="Calibri"/>
+                <a:hlinkClick r:id="rId7"/>
+              </a:rPr>
+              <a:t>https://medium.com/@manojpn/how-to-get-gemini-1-5-pro-api-key-bba09c46437e</a:t>
+            </a:r>
+            <a:r>
+              <a:rPr lang="en" sz="1000">
+                <a:latin typeface="Calibri"/>
+                <a:ea typeface="Calibri"/>
+                <a:cs typeface="Calibri"/>
+                <a:sym typeface="Calibri"/>
+              </a:rPr>
+              <a:t> </a:t>
+            </a:r>
+            <a:endParaRPr sz="1000">
               <a:latin typeface="Calibri"/>
               <a:ea typeface="Calibri"/>
               <a:cs typeface="Calibri"/>

--- a/2024/2024-03-22-AI-Updates.pptx
+++ b/2024/2024-03-22-AI-Updates.pptx
@@ -976,7 +976,7 @@
   <p:cSld>
     <p:spTree>
       <p:nvGrpSpPr>
-        <p:cNvPr id="1" name="Shape 136"/>
+        <p:cNvPr id="1" name="Shape 138"/>
         <p:cNvGrpSpPr/>
         <p:nvPr/>
       </p:nvGrpSpPr>
@@ -990,7 +990,7 @@
       </p:grpSpPr>
       <p:sp>
         <p:nvSpPr>
-          <p:cNvPr id="137" name="Google Shape;137;g2c565bbd142_1_5:notes"/>
+          <p:cNvPr id="139" name="Google Shape;139;g2c565bbd142_1_5:notes"/>
           <p:cNvSpPr>
             <a:spLocks noGrp="1" noRot="1" noChangeAspect="1"/>
           </p:cNvSpPr>
@@ -1041,7 +1041,7 @@
       </p:sp>
       <p:sp>
         <p:nvSpPr>
-          <p:cNvPr id="138" name="Google Shape;138;g2c565bbd142_1_5:notes"/>
+          <p:cNvPr id="140" name="Google Shape;140;g2c565bbd142_1_5:notes"/>
           <p:cNvSpPr txBox="1">
             <a:spLocks noGrp="1"/>
           </p:cNvSpPr>
@@ -1098,7 +1098,7 @@
   <p:cSld>
     <p:spTree>
       <p:nvGrpSpPr>
-        <p:cNvPr id="1" name="Shape 148"/>
+        <p:cNvPr id="1" name="Shape 150"/>
         <p:cNvGrpSpPr/>
         <p:nvPr/>
       </p:nvGrpSpPr>
@@ -1112,7 +1112,7 @@
       </p:grpSpPr>
       <p:sp>
         <p:nvSpPr>
-          <p:cNvPr id="149" name="Google Shape;149;g2c429e85adb_1_0:notes"/>
+          <p:cNvPr id="151" name="Google Shape;151;g2c429e85adb_1_0:notes"/>
           <p:cNvSpPr>
             <a:spLocks noGrp="1" noRot="1" noChangeAspect="1"/>
           </p:cNvSpPr>
@@ -1163,7 +1163,7 @@
       </p:sp>
       <p:sp>
         <p:nvSpPr>
-          <p:cNvPr id="150" name="Google Shape;150;g2c429e85adb_1_0:notes"/>
+          <p:cNvPr id="152" name="Google Shape;152;g2c429e85adb_1_0:notes"/>
           <p:cNvSpPr txBox="1">
             <a:spLocks noGrp="1"/>
           </p:cNvSpPr>
@@ -1220,7 +1220,7 @@
   <p:cSld>
     <p:spTree>
       <p:nvGrpSpPr>
-        <p:cNvPr id="1" name="Shape 156"/>
+        <p:cNvPr id="1" name="Shape 158"/>
         <p:cNvGrpSpPr/>
         <p:nvPr/>
       </p:nvGrpSpPr>
@@ -1234,7 +1234,7 @@
       </p:grpSpPr>
       <p:sp>
         <p:nvSpPr>
-          <p:cNvPr id="157" name="Google Shape;157;g2c448cc6a8b_0_0:notes"/>
+          <p:cNvPr id="159" name="Google Shape;159;g2c448cc6a8b_0_0:notes"/>
           <p:cNvSpPr>
             <a:spLocks noGrp="1" noRot="1" noChangeAspect="1"/>
           </p:cNvSpPr>
@@ -1285,7 +1285,7 @@
       </p:sp>
       <p:sp>
         <p:nvSpPr>
-          <p:cNvPr id="158" name="Google Shape;158;g2c448cc6a8b_0_0:notes"/>
+          <p:cNvPr id="160" name="Google Shape;160;g2c448cc6a8b_0_0:notes"/>
           <p:cNvSpPr txBox="1">
             <a:spLocks noGrp="1"/>
           </p:cNvSpPr>
@@ -1342,7 +1342,7 @@
   <p:cSld>
     <p:spTree>
       <p:nvGrpSpPr>
-        <p:cNvPr id="1" name="Shape 164"/>
+        <p:cNvPr id="1" name="Shape 166"/>
         <p:cNvGrpSpPr/>
         <p:nvPr/>
       </p:nvGrpSpPr>
@@ -1356,7 +1356,7 @@
       </p:grpSpPr>
       <p:sp>
         <p:nvSpPr>
-          <p:cNvPr id="165" name="Google Shape;165;g2c3bbb2fc7e_0_0:notes"/>
+          <p:cNvPr id="167" name="Google Shape;167;g2c3bbb2fc7e_0_0:notes"/>
           <p:cNvSpPr>
             <a:spLocks noGrp="1" noRot="1" noChangeAspect="1"/>
           </p:cNvSpPr>
@@ -1407,7 +1407,7 @@
       </p:sp>
       <p:sp>
         <p:nvSpPr>
-          <p:cNvPr id="166" name="Google Shape;166;g2c3bbb2fc7e_0_0:notes"/>
+          <p:cNvPr id="168" name="Google Shape;168;g2c3bbb2fc7e_0_0:notes"/>
           <p:cNvSpPr txBox="1">
             <a:spLocks noGrp="1"/>
           </p:cNvSpPr>
@@ -1464,7 +1464,7 @@
   <p:cSld>
     <p:spTree>
       <p:nvGrpSpPr>
-        <p:cNvPr id="1" name="Shape 173"/>
+        <p:cNvPr id="1" name="Shape 175"/>
         <p:cNvGrpSpPr/>
         <p:nvPr/>
       </p:nvGrpSpPr>
@@ -1478,7 +1478,7 @@
       </p:grpSpPr>
       <p:sp>
         <p:nvSpPr>
-          <p:cNvPr id="174" name="Google Shape;174;g2c565bbd142_0_3:notes"/>
+          <p:cNvPr id="176" name="Google Shape;176;g2c565bbd142_0_3:notes"/>
           <p:cNvSpPr>
             <a:spLocks noGrp="1" noRot="1" noChangeAspect="1"/>
           </p:cNvSpPr>
@@ -1519,7 +1519,7 @@
       </p:sp>
       <p:sp>
         <p:nvSpPr>
-          <p:cNvPr id="175" name="Google Shape;175;g2c565bbd142_0_3:notes"/>
+          <p:cNvPr id="177" name="Google Shape;177;g2c565bbd142_0_3:notes"/>
           <p:cNvSpPr txBox="1">
             <a:spLocks noGrp="1"/>
           </p:cNvSpPr>
@@ -1568,7 +1568,7 @@
   <p:cSld>
     <p:spTree>
       <p:nvGrpSpPr>
-        <p:cNvPr id="1" name="Shape 181"/>
+        <p:cNvPr id="1" name="Shape 183"/>
         <p:cNvGrpSpPr/>
         <p:nvPr/>
       </p:nvGrpSpPr>
@@ -1582,7 +1582,7 @@
       </p:grpSpPr>
       <p:sp>
         <p:nvSpPr>
-          <p:cNvPr id="182" name="Google Shape;182;p15:notes"/>
+          <p:cNvPr id="184" name="Google Shape;184;p15:notes"/>
           <p:cNvSpPr>
             <a:spLocks noGrp="1" noRot="1" noChangeAspect="1"/>
           </p:cNvSpPr>
@@ -1633,7 +1633,7 @@
       </p:sp>
       <p:sp>
         <p:nvSpPr>
-          <p:cNvPr id="183" name="Google Shape;183;p15:notes"/>
+          <p:cNvPr id="185" name="Google Shape;185;p15:notes"/>
           <p:cNvSpPr txBox="1">
             <a:spLocks noGrp="1"/>
           </p:cNvSpPr>
@@ -1690,7 +1690,7 @@
   <p:cSld>
     <p:spTree>
       <p:nvGrpSpPr>
-        <p:cNvPr id="1" name="Shape 194"/>
+        <p:cNvPr id="1" name="Shape 196"/>
         <p:cNvGrpSpPr/>
         <p:nvPr/>
       </p:nvGrpSpPr>
@@ -1704,7 +1704,7 @@
       </p:grpSpPr>
       <p:sp>
         <p:nvSpPr>
-          <p:cNvPr id="195" name="Google Shape;195;p16:notes"/>
+          <p:cNvPr id="197" name="Google Shape;197;p16:notes"/>
           <p:cNvSpPr>
             <a:spLocks noGrp="1" noRot="1" noChangeAspect="1"/>
           </p:cNvSpPr>
@@ -1755,7 +1755,7 @@
       </p:sp>
       <p:sp>
         <p:nvSpPr>
-          <p:cNvPr id="196" name="Google Shape;196;p16:notes"/>
+          <p:cNvPr id="198" name="Google Shape;198;p16:notes"/>
           <p:cNvSpPr txBox="1">
             <a:spLocks noGrp="1"/>
           </p:cNvSpPr>
@@ -1812,7 +1812,7 @@
   <p:cSld>
     <p:spTree>
       <p:nvGrpSpPr>
-        <p:cNvPr id="1" name="Shape 202"/>
+        <p:cNvPr id="1" name="Shape 204"/>
         <p:cNvGrpSpPr/>
         <p:nvPr/>
       </p:nvGrpSpPr>
@@ -1826,7 +1826,7 @@
       </p:grpSpPr>
       <p:sp>
         <p:nvSpPr>
-          <p:cNvPr id="203" name="Google Shape;203;p2:notes"/>
+          <p:cNvPr id="205" name="Google Shape;205;p2:notes"/>
           <p:cNvSpPr>
             <a:spLocks noGrp="1" noRot="1" noChangeAspect="1"/>
           </p:cNvSpPr>
@@ -1877,7 +1877,7 @@
       </p:sp>
       <p:sp>
         <p:nvSpPr>
-          <p:cNvPr id="204" name="Google Shape;204;p2:notes"/>
+          <p:cNvPr id="206" name="Google Shape;206;p2:notes"/>
           <p:cNvSpPr txBox="1">
             <a:spLocks noGrp="1"/>
           </p:cNvSpPr>
@@ -1934,7 +1934,7 @@
   <p:cSld>
     <p:spTree>
       <p:nvGrpSpPr>
-        <p:cNvPr id="1" name="Shape 212"/>
+        <p:cNvPr id="1" name="Shape 214"/>
         <p:cNvGrpSpPr/>
         <p:nvPr/>
       </p:nvGrpSpPr>
@@ -1948,7 +1948,7 @@
       </p:grpSpPr>
       <p:sp>
         <p:nvSpPr>
-          <p:cNvPr id="213" name="Google Shape;213;p17:notes"/>
+          <p:cNvPr id="215" name="Google Shape;215;p17:notes"/>
           <p:cNvSpPr>
             <a:spLocks noGrp="1" noRot="1" noChangeAspect="1"/>
           </p:cNvSpPr>
@@ -1999,7 +1999,7 @@
       </p:sp>
       <p:sp>
         <p:nvSpPr>
-          <p:cNvPr id="214" name="Google Shape;214;p17:notes"/>
+          <p:cNvPr id="216" name="Google Shape;216;p17:notes"/>
           <p:cNvSpPr txBox="1">
             <a:spLocks noGrp="1"/>
           </p:cNvSpPr>
@@ -2178,7 +2178,7 @@
   <p:cSld>
     <p:spTree>
       <p:nvGrpSpPr>
-        <p:cNvPr id="1" name="Shape 68"/>
+        <p:cNvPr id="1" name="Shape 70"/>
         <p:cNvGrpSpPr/>
         <p:nvPr/>
       </p:nvGrpSpPr>
@@ -2192,7 +2192,7 @@
       </p:grpSpPr>
       <p:sp>
         <p:nvSpPr>
-          <p:cNvPr id="69" name="Google Shape;69;g2c59744e853_1_0:notes"/>
+          <p:cNvPr id="71" name="Google Shape;71;g2c59744e853_1_0:notes"/>
           <p:cNvSpPr>
             <a:spLocks noGrp="1" noRot="1" noChangeAspect="1"/>
           </p:cNvSpPr>
@@ -2233,7 +2233,7 @@
       </p:sp>
       <p:sp>
         <p:nvSpPr>
-          <p:cNvPr id="70" name="Google Shape;70;g2c59744e853_1_0:notes"/>
+          <p:cNvPr id="72" name="Google Shape;72;g2c59744e853_1_0:notes"/>
           <p:cNvSpPr txBox="1">
             <a:spLocks noGrp="1"/>
           </p:cNvSpPr>
@@ -2282,7 +2282,7 @@
   <p:cSld>
     <p:spTree>
       <p:nvGrpSpPr>
-        <p:cNvPr id="1" name="Shape 76"/>
+        <p:cNvPr id="1" name="Shape 78"/>
         <p:cNvGrpSpPr/>
         <p:nvPr/>
       </p:nvGrpSpPr>
@@ -2296,7 +2296,7 @@
       </p:grpSpPr>
       <p:sp>
         <p:nvSpPr>
-          <p:cNvPr id="77" name="Google Shape;77;g2c35cf72cf0_0_0:notes"/>
+          <p:cNvPr id="79" name="Google Shape;79;g2c35cf72cf0_0_0:notes"/>
           <p:cNvSpPr>
             <a:spLocks noGrp="1" noRot="1" noChangeAspect="1"/>
           </p:cNvSpPr>
@@ -2347,7 +2347,7 @@
       </p:sp>
       <p:sp>
         <p:nvSpPr>
-          <p:cNvPr id="78" name="Google Shape;78;g2c35cf72cf0_0_0:notes"/>
+          <p:cNvPr id="80" name="Google Shape;80;g2c35cf72cf0_0_0:notes"/>
           <p:cNvSpPr txBox="1">
             <a:spLocks noGrp="1"/>
           </p:cNvSpPr>
@@ -2404,7 +2404,7 @@
   <p:cSld>
     <p:spTree>
       <p:nvGrpSpPr>
-        <p:cNvPr id="1" name="Shape 85"/>
+        <p:cNvPr id="1" name="Shape 87"/>
         <p:cNvGrpSpPr/>
         <p:nvPr/>
       </p:nvGrpSpPr>
@@ -2418,7 +2418,7 @@
       </p:grpSpPr>
       <p:sp>
         <p:nvSpPr>
-          <p:cNvPr id="86" name="Google Shape;86;g2c54fef5265_0_4:notes"/>
+          <p:cNvPr id="88" name="Google Shape;88;g2c54fef5265_0_4:notes"/>
           <p:cNvSpPr>
             <a:spLocks noGrp="1" noRot="1" noChangeAspect="1"/>
           </p:cNvSpPr>
@@ -2469,7 +2469,7 @@
       </p:sp>
       <p:sp>
         <p:nvSpPr>
-          <p:cNvPr id="87" name="Google Shape;87;g2c54fef5265_0_4:notes"/>
+          <p:cNvPr id="89" name="Google Shape;89;g2c54fef5265_0_4:notes"/>
           <p:cNvSpPr txBox="1">
             <a:spLocks noGrp="1"/>
           </p:cNvSpPr>
@@ -2526,7 +2526,7 @@
   <p:cSld>
     <p:spTree>
       <p:nvGrpSpPr>
-        <p:cNvPr id="1" name="Shape 94"/>
+        <p:cNvPr id="1" name="Shape 96"/>
         <p:cNvGrpSpPr/>
         <p:nvPr/>
       </p:nvGrpSpPr>
@@ -2540,7 +2540,7 @@
       </p:grpSpPr>
       <p:sp>
         <p:nvSpPr>
-          <p:cNvPr id="95" name="Google Shape;95;g2c29b856489_0_0:notes"/>
+          <p:cNvPr id="97" name="Google Shape;97;g2c29b856489_0_0:notes"/>
           <p:cNvSpPr>
             <a:spLocks noGrp="1" noRot="1" noChangeAspect="1"/>
           </p:cNvSpPr>
@@ -2591,7 +2591,7 @@
       </p:sp>
       <p:sp>
         <p:nvSpPr>
-          <p:cNvPr id="96" name="Google Shape;96;g2c29b856489_0_0:notes"/>
+          <p:cNvPr id="98" name="Google Shape;98;g2c29b856489_0_0:notes"/>
           <p:cNvSpPr txBox="1">
             <a:spLocks noGrp="1"/>
           </p:cNvSpPr>
@@ -2648,7 +2648,7 @@
   <p:cSld>
     <p:spTree>
       <p:nvGrpSpPr>
-        <p:cNvPr id="1" name="Shape 102"/>
+        <p:cNvPr id="1" name="Shape 104"/>
         <p:cNvGrpSpPr/>
         <p:nvPr/>
       </p:nvGrpSpPr>
@@ -2662,7 +2662,7 @@
       </p:grpSpPr>
       <p:sp>
         <p:nvSpPr>
-          <p:cNvPr id="103" name="Google Shape;103;g2c3aab23aca_0_0:notes"/>
+          <p:cNvPr id="105" name="Google Shape;105;g2c3aab23aca_0_0:notes"/>
           <p:cNvSpPr>
             <a:spLocks noGrp="1" noRot="1" noChangeAspect="1"/>
           </p:cNvSpPr>
@@ -2713,7 +2713,7 @@
       </p:sp>
       <p:sp>
         <p:nvSpPr>
-          <p:cNvPr id="104" name="Google Shape;104;g2c3aab23aca_0_0:notes"/>
+          <p:cNvPr id="106" name="Google Shape;106;g2c3aab23aca_0_0:notes"/>
           <p:cNvSpPr txBox="1">
             <a:spLocks noGrp="1"/>
           </p:cNvSpPr>
@@ -2770,7 +2770,7 @@
   <p:cSld>
     <p:spTree>
       <p:nvGrpSpPr>
-        <p:cNvPr id="1" name="Shape 110"/>
+        <p:cNvPr id="1" name="Shape 112"/>
         <p:cNvGrpSpPr/>
         <p:nvPr/>
       </p:nvGrpSpPr>
@@ -2784,7 +2784,7 @@
       </p:grpSpPr>
       <p:sp>
         <p:nvSpPr>
-          <p:cNvPr id="111" name="Google Shape;111;g2c37b28b028_0_0:notes"/>
+          <p:cNvPr id="113" name="Google Shape;113;g2c37b28b028_0_0:notes"/>
           <p:cNvSpPr>
             <a:spLocks noGrp="1" noRot="1" noChangeAspect="1"/>
           </p:cNvSpPr>
@@ -2835,7 +2835,7 @@
       </p:sp>
       <p:sp>
         <p:nvSpPr>
-          <p:cNvPr id="112" name="Google Shape;112;g2c37b28b028_0_0:notes"/>
+          <p:cNvPr id="114" name="Google Shape;114;g2c37b28b028_0_0:notes"/>
           <p:cNvSpPr txBox="1">
             <a:spLocks noGrp="1"/>
           </p:cNvSpPr>
@@ -2892,7 +2892,7 @@
   <p:cSld>
     <p:spTree>
       <p:nvGrpSpPr>
-        <p:cNvPr id="1" name="Shape 122"/>
+        <p:cNvPr id="1" name="Shape 124"/>
         <p:cNvGrpSpPr/>
         <p:nvPr/>
       </p:nvGrpSpPr>
@@ -2906,7 +2906,7 @@
       </p:grpSpPr>
       <p:sp>
         <p:nvSpPr>
-          <p:cNvPr id="123" name="Google Shape;123;g2c4992d3259_0_2:notes"/>
+          <p:cNvPr id="125" name="Google Shape;125;g2c4992d3259_0_2:notes"/>
           <p:cNvSpPr>
             <a:spLocks noGrp="1" noRot="1" noChangeAspect="1"/>
           </p:cNvSpPr>
@@ -2957,7 +2957,7 @@
       </p:sp>
       <p:sp>
         <p:nvSpPr>
-          <p:cNvPr id="124" name="Google Shape;124;g2c4992d3259_0_2:notes"/>
+          <p:cNvPr id="126" name="Google Shape;126;g2c4992d3259_0_2:notes"/>
           <p:cNvSpPr txBox="1">
             <a:spLocks noGrp="1"/>
           </p:cNvSpPr>
@@ -11840,7 +11840,7 @@
   <p:cSld>
     <p:spTree>
       <p:nvGrpSpPr>
-        <p:cNvPr id="1" name="Shape 139"/>
+        <p:cNvPr id="1" name="Shape 141"/>
         <p:cNvGrpSpPr/>
         <p:nvPr/>
       </p:nvGrpSpPr>
@@ -11854,7 +11854,7 @@
       </p:grpSpPr>
       <p:sp>
         <p:nvSpPr>
-          <p:cNvPr id="140" name="Google Shape;140;p22"/>
+          <p:cNvPr id="142" name="Google Shape;142;p22"/>
           <p:cNvSpPr txBox="1"/>
           <p:nvPr/>
         </p:nvSpPr>
@@ -11920,7 +11920,7 @@
       </p:sp>
       <p:sp>
         <p:nvSpPr>
-          <p:cNvPr id="141" name="Google Shape;141;p22"/>
+          <p:cNvPr id="143" name="Google Shape;143;p22"/>
           <p:cNvSpPr txBox="1"/>
           <p:nvPr/>
         </p:nvSpPr>
@@ -12153,7 +12153,7 @@
       </p:sp>
       <p:sp>
         <p:nvSpPr>
-          <p:cNvPr id="142" name="Google Shape;142;p22"/>
+          <p:cNvPr id="144" name="Google Shape;144;p22"/>
           <p:cNvSpPr txBox="1"/>
           <p:nvPr/>
         </p:nvSpPr>
@@ -12279,7 +12279,7 @@
       </p:sp>
       <p:sp>
         <p:nvSpPr>
-          <p:cNvPr id="143" name="Google Shape;143;p22"/>
+          <p:cNvPr id="145" name="Google Shape;145;p22"/>
           <p:cNvSpPr txBox="1"/>
           <p:nvPr/>
         </p:nvSpPr>
@@ -12949,7 +12949,7 @@
       </p:sp>
       <p:sp>
         <p:nvSpPr>
-          <p:cNvPr id="144" name="Google Shape;144;p22"/>
+          <p:cNvPr id="146" name="Google Shape;146;p22"/>
           <p:cNvSpPr txBox="1"/>
           <p:nvPr/>
         </p:nvSpPr>
@@ -13092,7 +13092,7 @@
       </p:sp>
       <p:pic>
         <p:nvPicPr>
-          <p:cNvPr id="145" name="Google Shape;145;p22"/>
+          <p:cNvPr id="147" name="Google Shape;147;p22"/>
           <p:cNvPicPr preferRelativeResize="0"/>
           <p:nvPr/>
         </p:nvPicPr>
@@ -13125,7 +13125,7 @@
       </p:pic>
       <p:sp>
         <p:nvSpPr>
-          <p:cNvPr id="146" name="Google Shape;146;p22"/>
+          <p:cNvPr id="148" name="Google Shape;148;p22"/>
           <p:cNvSpPr txBox="1"/>
           <p:nvPr/>
         </p:nvSpPr>
@@ -13241,7 +13241,7 @@
       </p:sp>
       <p:sp>
         <p:nvSpPr>
-          <p:cNvPr id="147" name="Google Shape;147;p22"/>
+          <p:cNvPr id="149" name="Google Shape;149;p22"/>
           <p:cNvSpPr txBox="1"/>
           <p:nvPr/>
         </p:nvSpPr>
@@ -13522,7 +13522,7 @@
   <p:cSld>
     <p:spTree>
       <p:nvGrpSpPr>
-        <p:cNvPr id="1" name="Shape 151"/>
+        <p:cNvPr id="1" name="Shape 153"/>
         <p:cNvGrpSpPr/>
         <p:nvPr/>
       </p:nvGrpSpPr>
@@ -13536,7 +13536,7 @@
       </p:grpSpPr>
       <p:sp>
         <p:nvSpPr>
-          <p:cNvPr id="152" name="Google Shape;152;p23"/>
+          <p:cNvPr id="154" name="Google Shape;154;p23"/>
           <p:cNvSpPr txBox="1"/>
           <p:nvPr/>
         </p:nvSpPr>
@@ -13602,7 +13602,7 @@
       </p:sp>
       <p:sp>
         <p:nvSpPr>
-          <p:cNvPr id="153" name="Google Shape;153;p23"/>
+          <p:cNvPr id="155" name="Google Shape;155;p23"/>
           <p:cNvSpPr txBox="1"/>
           <p:nvPr/>
         </p:nvSpPr>
@@ -13916,7 +13916,7 @@
       </p:sp>
       <p:sp>
         <p:nvSpPr>
-          <p:cNvPr id="154" name="Google Shape;154;p23"/>
+          <p:cNvPr id="156" name="Google Shape;156;p23"/>
           <p:cNvSpPr txBox="1"/>
           <p:nvPr/>
         </p:nvSpPr>
@@ -14118,7 +14118,7 @@
       </p:sp>
       <p:pic>
         <p:nvPicPr>
-          <p:cNvPr id="155" name="Google Shape;155;p23"/>
+          <p:cNvPr id="157" name="Google Shape;157;p23"/>
           <p:cNvPicPr preferRelativeResize="0"/>
           <p:nvPr/>
         </p:nvPicPr>
@@ -14161,7 +14161,7 @@
   <p:cSld>
     <p:spTree>
       <p:nvGrpSpPr>
-        <p:cNvPr id="1" name="Shape 159"/>
+        <p:cNvPr id="1" name="Shape 161"/>
         <p:cNvGrpSpPr/>
         <p:nvPr/>
       </p:nvGrpSpPr>
@@ -14175,7 +14175,7 @@
       </p:grpSpPr>
       <p:sp>
         <p:nvSpPr>
-          <p:cNvPr id="160" name="Google Shape;160;p24"/>
+          <p:cNvPr id="162" name="Google Shape;162;p24"/>
           <p:cNvSpPr txBox="1"/>
           <p:nvPr/>
         </p:nvSpPr>
@@ -14236,7 +14236,7 @@
       </p:sp>
       <p:sp>
         <p:nvSpPr>
-          <p:cNvPr id="161" name="Google Shape;161;p24"/>
+          <p:cNvPr id="163" name="Google Shape;163;p24"/>
           <p:cNvSpPr txBox="1"/>
           <p:nvPr/>
         </p:nvSpPr>
@@ -14633,7 +14633,7 @@
       </p:sp>
       <p:pic>
         <p:nvPicPr>
-          <p:cNvPr id="162" name="Google Shape;162;p24"/>
+          <p:cNvPr id="164" name="Google Shape;164;p24"/>
           <p:cNvPicPr preferRelativeResize="0"/>
           <p:nvPr/>
         </p:nvPicPr>
@@ -14666,7 +14666,7 @@
       </p:pic>
       <p:sp>
         <p:nvSpPr>
-          <p:cNvPr id="163" name="Google Shape;163;p24"/>
+          <p:cNvPr id="165" name="Google Shape;165;p24"/>
           <p:cNvSpPr txBox="1"/>
           <p:nvPr/>
         </p:nvSpPr>
@@ -14980,7 +14980,7 @@
   <p:cSld>
     <p:spTree>
       <p:nvGrpSpPr>
-        <p:cNvPr id="1" name="Shape 167"/>
+        <p:cNvPr id="1" name="Shape 169"/>
         <p:cNvGrpSpPr/>
         <p:nvPr/>
       </p:nvGrpSpPr>
@@ -14994,7 +14994,7 @@
       </p:grpSpPr>
       <p:sp>
         <p:nvSpPr>
-          <p:cNvPr id="168" name="Google Shape;168;p25"/>
+          <p:cNvPr id="170" name="Google Shape;170;p25"/>
           <p:cNvSpPr txBox="1"/>
           <p:nvPr/>
         </p:nvSpPr>
@@ -15060,7 +15060,7 @@
       </p:sp>
       <p:sp>
         <p:nvSpPr>
-          <p:cNvPr id="169" name="Google Shape;169;p25"/>
+          <p:cNvPr id="171" name="Google Shape;171;p25"/>
           <p:cNvSpPr txBox="1"/>
           <p:nvPr/>
         </p:nvSpPr>
@@ -15193,7 +15193,7 @@
       </p:sp>
       <p:pic>
         <p:nvPicPr>
-          <p:cNvPr id="170" name="Google Shape;170;p25"/>
+          <p:cNvPr id="172" name="Google Shape;172;p25"/>
           <p:cNvPicPr preferRelativeResize="0"/>
           <p:nvPr/>
         </p:nvPicPr>
@@ -15226,7 +15226,7 @@
       </p:pic>
       <p:pic>
         <p:nvPicPr>
-          <p:cNvPr id="171" name="Google Shape;171;p25"/>
+          <p:cNvPr id="173" name="Google Shape;173;p25"/>
           <p:cNvPicPr preferRelativeResize="0"/>
           <p:nvPr/>
         </p:nvPicPr>
@@ -15259,7 +15259,7 @@
       </p:pic>
       <p:sp>
         <p:nvSpPr>
-          <p:cNvPr id="172" name="Google Shape;172;p25"/>
+          <p:cNvPr id="174" name="Google Shape;174;p25"/>
           <p:cNvSpPr txBox="1"/>
           <p:nvPr/>
         </p:nvSpPr>
@@ -15464,7 +15464,7 @@
   <p:cSld>
     <p:spTree>
       <p:nvGrpSpPr>
-        <p:cNvPr id="1" name="Shape 176"/>
+        <p:cNvPr id="1" name="Shape 178"/>
         <p:cNvGrpSpPr/>
         <p:nvPr/>
       </p:nvGrpSpPr>
@@ -15478,7 +15478,7 @@
       </p:grpSpPr>
       <p:sp>
         <p:nvSpPr>
-          <p:cNvPr id="177" name="Google Shape;177;p26"/>
+          <p:cNvPr id="179" name="Google Shape;179;p26"/>
           <p:cNvSpPr txBox="1"/>
           <p:nvPr/>
         </p:nvSpPr>
@@ -15533,7 +15533,7 @@
       </p:sp>
       <p:sp>
         <p:nvSpPr>
-          <p:cNvPr id="178" name="Google Shape;178;p26"/>
+          <p:cNvPr id="180" name="Google Shape;180;p26"/>
           <p:cNvSpPr txBox="1"/>
           <p:nvPr/>
         </p:nvSpPr>
@@ -15974,7 +15974,7 @@
       </p:sp>
       <p:pic>
         <p:nvPicPr>
-          <p:cNvPr id="179" name="Google Shape;179;p26"/>
+          <p:cNvPr id="181" name="Google Shape;181;p26"/>
           <p:cNvPicPr preferRelativeResize="0"/>
           <p:nvPr/>
         </p:nvPicPr>
@@ -16007,7 +16007,7 @@
       </p:pic>
       <p:sp>
         <p:nvSpPr>
-          <p:cNvPr id="180" name="Google Shape;180;p26"/>
+          <p:cNvPr id="182" name="Google Shape;182;p26"/>
           <p:cNvSpPr txBox="1"/>
           <p:nvPr/>
         </p:nvSpPr>
@@ -16265,7 +16265,7 @@
   <p:cSld>
     <p:spTree>
       <p:nvGrpSpPr>
-        <p:cNvPr id="1" name="Shape 184"/>
+        <p:cNvPr id="1" name="Shape 186"/>
         <p:cNvGrpSpPr/>
         <p:nvPr/>
       </p:nvGrpSpPr>
@@ -16279,7 +16279,7 @@
       </p:grpSpPr>
       <p:sp>
         <p:nvSpPr>
-          <p:cNvPr id="185" name="Google Shape;185;p27"/>
+          <p:cNvPr id="187" name="Google Shape;187;p27"/>
           <p:cNvSpPr txBox="1"/>
           <p:nvPr/>
         </p:nvSpPr>
@@ -16425,7 +16425,7 @@
       </p:sp>
       <p:sp>
         <p:nvSpPr>
-          <p:cNvPr id="186" name="Google Shape;186;p27"/>
+          <p:cNvPr id="188" name="Google Shape;188;p27"/>
           <p:cNvSpPr txBox="1"/>
           <p:nvPr/>
         </p:nvSpPr>
@@ -16539,7 +16539,7 @@
       </p:sp>
       <p:sp>
         <p:nvSpPr>
-          <p:cNvPr id="187" name="Google Shape;187;p27"/>
+          <p:cNvPr id="189" name="Google Shape;189;p27"/>
           <p:cNvSpPr txBox="1"/>
           <p:nvPr/>
         </p:nvSpPr>
@@ -16605,7 +16605,7 @@
       </p:sp>
       <p:sp>
         <p:nvSpPr>
-          <p:cNvPr id="188" name="Google Shape;188;p27"/>
+          <p:cNvPr id="190" name="Google Shape;190;p27"/>
           <p:cNvSpPr txBox="1"/>
           <p:nvPr/>
         </p:nvSpPr>
@@ -16684,7 +16684,7 @@
       </p:sp>
       <p:pic>
         <p:nvPicPr>
-          <p:cNvPr id="189" name="Google Shape;189;p27"/>
+          <p:cNvPr id="191" name="Google Shape;191;p27"/>
           <p:cNvPicPr preferRelativeResize="0"/>
           <p:nvPr/>
         </p:nvPicPr>
@@ -16717,7 +16717,7 @@
       </p:pic>
       <p:pic>
         <p:nvPicPr>
-          <p:cNvPr id="190" name="Google Shape;190;p27"/>
+          <p:cNvPr id="192" name="Google Shape;192;p27"/>
           <p:cNvPicPr preferRelativeResize="0"/>
           <p:nvPr/>
         </p:nvPicPr>
@@ -16749,7 +16749,7 @@
       </p:pic>
       <p:sp>
         <p:nvSpPr>
-          <p:cNvPr id="191" name="Google Shape;191;p27"/>
+          <p:cNvPr id="193" name="Google Shape;193;p27"/>
           <p:cNvSpPr txBox="1"/>
           <p:nvPr/>
         </p:nvSpPr>
@@ -16823,7 +16823,7 @@
       </p:sp>
       <p:sp>
         <p:nvSpPr>
-          <p:cNvPr id="192" name="Google Shape;192;p27"/>
+          <p:cNvPr id="194" name="Google Shape;194;p27"/>
           <p:cNvSpPr txBox="1"/>
           <p:nvPr/>
         </p:nvSpPr>
@@ -16897,7 +16897,7 @@
       </p:sp>
       <p:sp>
         <p:nvSpPr>
-          <p:cNvPr id="193" name="Google Shape;193;p27"/>
+          <p:cNvPr id="195" name="Google Shape;195;p27"/>
           <p:cNvSpPr txBox="1"/>
           <p:nvPr/>
         </p:nvSpPr>
@@ -16982,7 +16982,7 @@
   <p:cSld>
     <p:spTree>
       <p:nvGrpSpPr>
-        <p:cNvPr id="1" name="Shape 197"/>
+        <p:cNvPr id="1" name="Shape 199"/>
         <p:cNvGrpSpPr/>
         <p:nvPr/>
       </p:nvGrpSpPr>
@@ -16996,7 +16996,7 @@
       </p:grpSpPr>
       <p:sp>
         <p:nvSpPr>
-          <p:cNvPr id="198" name="Google Shape;198;p28"/>
+          <p:cNvPr id="200" name="Google Shape;200;p28"/>
           <p:cNvSpPr txBox="1"/>
           <p:nvPr/>
         </p:nvSpPr>
@@ -17074,7 +17074,7 @@
       </p:sp>
       <p:sp>
         <p:nvSpPr>
-          <p:cNvPr id="199" name="Google Shape;199;p28"/>
+          <p:cNvPr id="201" name="Google Shape;201;p28"/>
           <p:cNvSpPr txBox="1"/>
           <p:nvPr/>
         </p:nvSpPr>
@@ -17165,7 +17165,7 @@
       </p:sp>
       <p:pic>
         <p:nvPicPr>
-          <p:cNvPr id="200" name="Google Shape;200;p28"/>
+          <p:cNvPr id="202" name="Google Shape;202;p28"/>
           <p:cNvPicPr preferRelativeResize="0"/>
           <p:nvPr/>
         </p:nvPicPr>
@@ -17198,7 +17198,7 @@
       </p:pic>
       <p:sp>
         <p:nvSpPr>
-          <p:cNvPr id="201" name="Google Shape;201;p28"/>
+          <p:cNvPr id="203" name="Google Shape;203;p28"/>
           <p:cNvSpPr txBox="1"/>
           <p:nvPr/>
         </p:nvSpPr>
@@ -17293,7 +17293,7 @@
   <p:cSld>
     <p:spTree>
       <p:nvGrpSpPr>
-        <p:cNvPr id="1" name="Shape 205"/>
+        <p:cNvPr id="1" name="Shape 207"/>
         <p:cNvGrpSpPr/>
         <p:nvPr/>
       </p:nvGrpSpPr>
@@ -17307,7 +17307,7 @@
       </p:grpSpPr>
       <p:pic>
         <p:nvPicPr>
-          <p:cNvPr id="206" name="Google Shape;206;p29"/>
+          <p:cNvPr id="208" name="Google Shape;208;p29"/>
           <p:cNvPicPr preferRelativeResize="0"/>
           <p:nvPr/>
         </p:nvPicPr>
@@ -17334,7 +17334,7 @@
       </p:pic>
       <p:sp>
         <p:nvSpPr>
-          <p:cNvPr id="207" name="Google Shape;207;p29"/>
+          <p:cNvPr id="209" name="Google Shape;209;p29"/>
           <p:cNvSpPr txBox="1"/>
           <p:nvPr/>
         </p:nvSpPr>
@@ -17400,7 +17400,7 @@
       </p:sp>
       <p:sp>
         <p:nvSpPr>
-          <p:cNvPr id="208" name="Google Shape;208;p29"/>
+          <p:cNvPr id="210" name="Google Shape;210;p29"/>
           <p:cNvSpPr txBox="1"/>
           <p:nvPr/>
         </p:nvSpPr>
@@ -17830,7 +17830,7 @@
       </p:sp>
       <p:pic>
         <p:nvPicPr>
-          <p:cNvPr id="209" name="Google Shape;209;p29"/>
+          <p:cNvPr id="211" name="Google Shape;211;p29"/>
           <p:cNvPicPr preferRelativeResize="0"/>
           <p:nvPr/>
         </p:nvPicPr>
@@ -17862,7 +17862,7 @@
       </p:pic>
       <p:sp>
         <p:nvSpPr>
-          <p:cNvPr id="210" name="Google Shape;210;p29"/>
+          <p:cNvPr id="212" name="Google Shape;212;p29"/>
           <p:cNvSpPr txBox="1"/>
           <p:nvPr/>
         </p:nvSpPr>
@@ -17941,7 +17941,7 @@
       </p:sp>
       <p:sp>
         <p:nvSpPr>
-          <p:cNvPr id="211" name="Google Shape;211;p29"/>
+          <p:cNvPr id="213" name="Google Shape;213;p29"/>
           <p:cNvSpPr txBox="1"/>
           <p:nvPr/>
         </p:nvSpPr>
@@ -18018,7 +18018,7 @@
   <p:cSld>
     <p:spTree>
       <p:nvGrpSpPr>
-        <p:cNvPr id="1" name="Shape 215"/>
+        <p:cNvPr id="1" name="Shape 217"/>
         <p:cNvGrpSpPr/>
         <p:nvPr/>
       </p:nvGrpSpPr>
@@ -18032,7 +18032,7 @@
       </p:grpSpPr>
       <p:sp>
         <p:nvSpPr>
-          <p:cNvPr id="216" name="Google Shape;216;p30"/>
+          <p:cNvPr id="218" name="Google Shape;218;p30"/>
           <p:cNvSpPr txBox="1"/>
           <p:nvPr/>
         </p:nvSpPr>
@@ -18195,7 +18195,7 @@
         </p:nvSpPr>
         <p:spPr>
           <a:xfrm>
-            <a:off x="139575" y="427875"/>
+            <a:off x="32575" y="427875"/>
             <a:ext cx="4343100" cy="637200"/>
           </a:xfrm>
           <a:prstGeom prst="rect">
@@ -18338,7 +18338,7 @@
         </p:blipFill>
         <p:spPr>
           <a:xfrm>
-            <a:off x="283575" y="2639050"/>
+            <a:off x="69550" y="2838800"/>
             <a:ext cx="3961950" cy="2228600"/>
           </a:xfrm>
           <a:prstGeom prst="rect">
@@ -18358,7 +18358,7 @@
         </p:nvSpPr>
         <p:spPr>
           <a:xfrm>
-            <a:off x="139575" y="1134101"/>
+            <a:off x="32575" y="1134101"/>
             <a:ext cx="4343100" cy="1329900"/>
           </a:xfrm>
           <a:prstGeom prst="rect">
@@ -18575,8 +18575,13 @@
           <p:nvPr/>
         </p:nvPicPr>
         <p:blipFill>
-          <a:blip r:embed="rId4">
+          <a:blip r:embed="rId4" cstate="email">
             <a:alphaModFix/>
+            <a:extLst>
+              <a:ext uri="{28A0092B-C50C-407E-A947-70E740481C1C}">
+                <a14:useLocalDpi xmlns:a14="http://schemas.microsoft.com/office/drawing/2010/main"/>
+              </a:ext>
+            </a:extLst>
           </a:blip>
           <a:stretch>
             <a:fillRect/>
@@ -18584,8 +18589,8 @@
         </p:blipFill>
         <p:spPr>
           <a:xfrm>
-            <a:off x="4778805" y="2648450"/>
-            <a:ext cx="3943350" cy="2209800"/>
+            <a:off x="6202601" y="3474175"/>
+            <a:ext cx="2826300" cy="1583825"/>
           </a:xfrm>
           <a:prstGeom prst="rect">
             <a:avLst/>
@@ -18616,8 +18621,8 @@
         </p:blipFill>
         <p:spPr>
           <a:xfrm>
-            <a:off x="4847625" y="427875"/>
-            <a:ext cx="1740620" cy="1883775"/>
+            <a:off x="4084300" y="2838800"/>
+            <a:ext cx="1722650" cy="1864325"/>
           </a:xfrm>
           <a:prstGeom prst="rect">
             <a:avLst/>
@@ -18636,7 +18641,7 @@
         </p:nvSpPr>
         <p:spPr>
           <a:xfrm>
-            <a:off x="5506825" y="2311650"/>
+            <a:off x="4684925" y="4765700"/>
             <a:ext cx="521400" cy="203100"/>
           </a:xfrm>
           <a:prstGeom prst="rect">
@@ -18682,6 +18687,207 @@
           </a:p>
         </p:txBody>
       </p:sp>
+      <p:pic>
+        <p:nvPicPr>
+          <p:cNvPr id="68" name="Google Shape;68;p14"/>
+          <p:cNvPicPr preferRelativeResize="0"/>
+          <p:nvPr/>
+        </p:nvPicPr>
+        <p:blipFill>
+          <a:blip r:embed="rId6" cstate="email">
+            <a:alphaModFix/>
+            <a:extLst>
+              <a:ext uri="{28A0092B-C50C-407E-A947-70E740481C1C}">
+                <a14:useLocalDpi xmlns:a14="http://schemas.microsoft.com/office/drawing/2010/main"/>
+              </a:ext>
+            </a:extLst>
+          </a:blip>
+          <a:stretch>
+            <a:fillRect/>
+          </a:stretch>
+        </p:blipFill>
+        <p:spPr>
+          <a:xfrm>
+            <a:off x="6981926" y="97300"/>
+            <a:ext cx="1267650" cy="1542925"/>
+          </a:xfrm>
+          <a:prstGeom prst="rect">
+            <a:avLst/>
+          </a:prstGeom>
+          <a:noFill/>
+          <a:ln w="9525" cap="flat" cmpd="sng">
+            <a:solidFill>
+              <a:srgbClr val="FF0000"/>
+            </a:solidFill>
+            <a:prstDash val="solid"/>
+            <a:round/>
+            <a:headEnd type="none" w="sm" len="sm"/>
+            <a:tailEnd type="none" w="sm" len="sm"/>
+          </a:ln>
+        </p:spPr>
+      </p:pic>
+      <p:sp>
+        <p:nvSpPr>
+          <p:cNvPr id="69" name="Google Shape;69;p14"/>
+          <p:cNvSpPr txBox="1"/>
+          <p:nvPr/>
+        </p:nvSpPr>
+        <p:spPr>
+          <a:xfrm>
+            <a:off x="6746735" y="1698100"/>
+            <a:ext cx="1845600" cy="1185300"/>
+          </a:xfrm>
+          <a:prstGeom prst="rect">
+            <a:avLst/>
+          </a:prstGeom>
+          <a:solidFill>
+            <a:srgbClr val="FFF2CC"/>
+          </a:solidFill>
+          <a:ln w="9525" cap="flat" cmpd="sng">
+            <a:solidFill>
+              <a:srgbClr val="FF0000"/>
+            </a:solidFill>
+            <a:prstDash val="solid"/>
+            <a:round/>
+            <a:headEnd type="none" w="sm" len="sm"/>
+            <a:tailEnd type="none" w="sm" len="sm"/>
+          </a:ln>
+        </p:spPr>
+        <p:txBody>
+          <a:bodyPr spcFirstLastPara="1" wrap="square" lIns="91425" tIns="91425" rIns="91425" bIns="91425" anchor="t" anchorCtr="0">
+            <a:spAutoFit/>
+          </a:bodyPr>
+          <a:lstStyle/>
+          <a:p>
+            <a:pPr marL="0" lvl="0" indent="0" algn="ctr" rtl="0">
+              <a:spcBef>
+                <a:spcPts val="0"/>
+              </a:spcBef>
+              <a:spcAft>
+                <a:spcPts val="0"/>
+              </a:spcAft>
+              <a:buNone/>
+            </a:pPr>
+            <a:r>
+              <a:rPr lang="en" sz="1300" b="1">
+                <a:solidFill>
+                  <a:srgbClr val="FF0000"/>
+                </a:solidFill>
+                <a:latin typeface="Calibri"/>
+                <a:ea typeface="Calibri"/>
+                <a:cs typeface="Calibri"/>
+                <a:sym typeface="Calibri"/>
+              </a:rPr>
+              <a:t>David Harold Blackwell</a:t>
+            </a:r>
+            <a:endParaRPr sz="1300" b="1">
+              <a:solidFill>
+                <a:srgbClr val="FF0000"/>
+              </a:solidFill>
+              <a:latin typeface="Calibri"/>
+              <a:ea typeface="Calibri"/>
+              <a:cs typeface="Calibri"/>
+              <a:sym typeface="Calibri"/>
+            </a:endParaRPr>
+          </a:p>
+          <a:p>
+            <a:pPr marL="0" lvl="0" indent="0" algn="ctr" rtl="0">
+              <a:spcBef>
+                <a:spcPts val="0"/>
+              </a:spcBef>
+              <a:spcAft>
+                <a:spcPts val="0"/>
+              </a:spcAft>
+              <a:buNone/>
+            </a:pPr>
+            <a:r>
+              <a:rPr lang="en" sz="1300">
+                <a:solidFill>
+                  <a:srgbClr val="0F0F0F"/>
+                </a:solidFill>
+                <a:latin typeface="Calibri"/>
+                <a:ea typeface="Calibri"/>
+                <a:cs typeface="Calibri"/>
+                <a:sym typeface="Calibri"/>
+              </a:rPr>
+              <a:t>(1919 – 2010) </a:t>
+            </a:r>
+            <a:endParaRPr sz="1300">
+              <a:solidFill>
+                <a:srgbClr val="0F0F0F"/>
+              </a:solidFill>
+              <a:latin typeface="Calibri"/>
+              <a:ea typeface="Calibri"/>
+              <a:cs typeface="Calibri"/>
+              <a:sym typeface="Calibri"/>
+            </a:endParaRPr>
+          </a:p>
+          <a:p>
+            <a:pPr marL="0" lvl="0" indent="0" algn="ctr" rtl="0">
+              <a:spcBef>
+                <a:spcPts val="0"/>
+              </a:spcBef>
+              <a:spcAft>
+                <a:spcPts val="0"/>
+              </a:spcAft>
+              <a:buNone/>
+            </a:pPr>
+            <a:r>
+              <a:rPr lang="en" sz="1300">
+                <a:solidFill>
+                  <a:srgbClr val="0F0F0F"/>
+                </a:solidFill>
+                <a:latin typeface="Calibri"/>
+                <a:ea typeface="Calibri"/>
+                <a:cs typeface="Calibri"/>
+                <a:sym typeface="Calibri"/>
+              </a:rPr>
+              <a:t>American statistician and mathematician,</a:t>
+            </a:r>
+            <a:endParaRPr sz="1300">
+              <a:solidFill>
+                <a:srgbClr val="0F0F0F"/>
+              </a:solidFill>
+              <a:latin typeface="Calibri"/>
+              <a:ea typeface="Calibri"/>
+              <a:cs typeface="Calibri"/>
+              <a:sym typeface="Calibri"/>
+            </a:endParaRPr>
+          </a:p>
+          <a:p>
+            <a:pPr marL="0" lvl="0" indent="0" algn="ctr" rtl="0">
+              <a:spcBef>
+                <a:spcPts val="0"/>
+              </a:spcBef>
+              <a:spcAft>
+                <a:spcPts val="0"/>
+              </a:spcAft>
+              <a:buNone/>
+            </a:pPr>
+            <a:r>
+              <a:rPr lang="en" sz="1300">
+                <a:solidFill>
+                  <a:srgbClr val="0F0F0F"/>
+                </a:solidFill>
+                <a:latin typeface="Calibri"/>
+                <a:ea typeface="Calibri"/>
+                <a:cs typeface="Calibri"/>
+                <a:sym typeface="Calibri"/>
+              </a:rPr>
+              <a:t>UC Berkeley (1954-88)</a:t>
+            </a:r>
+            <a:endParaRPr sz="1300">
+              <a:solidFill>
+                <a:srgbClr val="0F0F0F"/>
+              </a:solidFill>
+              <a:latin typeface="Calibri"/>
+              <a:ea typeface="Calibri"/>
+              <a:cs typeface="Calibri"/>
+              <a:sym typeface="Calibri"/>
+            </a:endParaRPr>
+          </a:p>
+        </p:txBody>
+      </p:sp>
     </p:spTree>
   </p:cSld>
   <p:clrMapOvr>
@@ -18695,7 +18901,7 @@
   <p:cSld>
     <p:spTree>
       <p:nvGrpSpPr>
-        <p:cNvPr id="1" name="Shape 71"/>
+        <p:cNvPr id="1" name="Shape 73"/>
         <p:cNvGrpSpPr/>
         <p:nvPr/>
       </p:nvGrpSpPr>
@@ -18709,7 +18915,7 @@
       </p:grpSpPr>
       <p:sp>
         <p:nvSpPr>
-          <p:cNvPr id="72" name="Google Shape;72;p15"/>
+          <p:cNvPr id="74" name="Google Shape;74;p15"/>
           <p:cNvSpPr txBox="1"/>
           <p:nvPr/>
         </p:nvSpPr>
@@ -18767,7 +18973,7 @@
       </p:sp>
       <p:sp>
         <p:nvSpPr>
-          <p:cNvPr id="73" name="Google Shape;73;p15"/>
+          <p:cNvPr id="75" name="Google Shape;75;p15"/>
           <p:cNvSpPr txBox="1"/>
           <p:nvPr/>
         </p:nvSpPr>
@@ -18969,7 +19175,7 @@
       </p:sp>
       <p:pic>
         <p:nvPicPr>
-          <p:cNvPr id="74" name="Google Shape;74;p15"/>
+          <p:cNvPr id="76" name="Google Shape;76;p15"/>
           <p:cNvPicPr preferRelativeResize="0"/>
           <p:nvPr/>
         </p:nvPicPr>
@@ -19002,7 +19208,7 @@
       </p:pic>
       <p:sp>
         <p:nvSpPr>
-          <p:cNvPr id="75" name="Google Shape;75;p15"/>
+          <p:cNvPr id="77" name="Google Shape;77;p15"/>
           <p:cNvSpPr txBox="1"/>
           <p:nvPr/>
         </p:nvSpPr>
@@ -19195,7 +19401,7 @@
   <p:cSld>
     <p:spTree>
       <p:nvGrpSpPr>
-        <p:cNvPr id="1" name="Shape 79"/>
+        <p:cNvPr id="1" name="Shape 81"/>
         <p:cNvGrpSpPr/>
         <p:nvPr/>
       </p:nvGrpSpPr>
@@ -19209,7 +19415,7 @@
       </p:grpSpPr>
       <p:sp>
         <p:nvSpPr>
-          <p:cNvPr id="80" name="Google Shape;80;p16"/>
+          <p:cNvPr id="82" name="Google Shape;82;p16"/>
           <p:cNvSpPr txBox="1"/>
           <p:nvPr/>
         </p:nvSpPr>
@@ -19275,7 +19481,7 @@
       </p:sp>
       <p:sp>
         <p:nvSpPr>
-          <p:cNvPr id="81" name="Google Shape;81;p16"/>
+          <p:cNvPr id="83" name="Google Shape;83;p16"/>
           <p:cNvSpPr txBox="1"/>
           <p:nvPr/>
         </p:nvSpPr>
@@ -20373,6 +20579,18 @@
               <a:buNone/>
             </a:pPr>
             <a:r>
+              <a:rPr lang="en" sz="1200" b="1">
+                <a:solidFill>
+                  <a:srgbClr val="FF0000"/>
+                </a:solidFill>
+                <a:latin typeface="Calibri"/>
+                <a:ea typeface="Calibri"/>
+                <a:cs typeface="Calibri"/>
+                <a:sym typeface="Calibri"/>
+              </a:rPr>
+              <a:t>AutoGen</a:t>
+            </a:r>
+            <a:r>
               <a:rPr lang="en" sz="1200">
                 <a:solidFill>
                   <a:schemeClr val="dk1"/>
@@ -20382,7 +20600,7 @@
                 <a:cs typeface="Calibri"/>
                 <a:sym typeface="Calibri"/>
               </a:rPr>
-              <a:t>AutoGen - open source - build LLM apps using multiple agents</a:t>
+              <a:t> - open source - build LLM apps using multiple agents</a:t>
             </a:r>
             <a:endParaRPr sz="1200">
               <a:solidFill>
@@ -20445,7 +20663,7 @@
       </p:sp>
       <p:sp>
         <p:nvSpPr>
-          <p:cNvPr id="82" name="Google Shape;82;p16"/>
+          <p:cNvPr id="84" name="Google Shape;84;p16"/>
           <p:cNvSpPr txBox="1"/>
           <p:nvPr/>
         </p:nvSpPr>
@@ -21146,7 +21364,7 @@
       </p:sp>
       <p:sp>
         <p:nvSpPr>
-          <p:cNvPr id="83" name="Google Shape;83;p16"/>
+          <p:cNvPr id="85" name="Google Shape;85;p16"/>
           <p:cNvSpPr txBox="1"/>
           <p:nvPr/>
         </p:nvSpPr>
@@ -21329,7 +21547,7 @@
       </p:sp>
       <p:sp>
         <p:nvSpPr>
-          <p:cNvPr id="84" name="Google Shape;84;p16"/>
+          <p:cNvPr id="86" name="Google Shape;86;p16"/>
           <p:cNvSpPr txBox="1"/>
           <p:nvPr/>
         </p:nvSpPr>
@@ -21559,7 +21777,7 @@
   <p:cSld>
     <p:spTree>
       <p:nvGrpSpPr>
-        <p:cNvPr id="1" name="Shape 88"/>
+        <p:cNvPr id="1" name="Shape 90"/>
         <p:cNvGrpSpPr/>
         <p:nvPr/>
       </p:nvGrpSpPr>
@@ -21573,7 +21791,7 @@
       </p:grpSpPr>
       <p:sp>
         <p:nvSpPr>
-          <p:cNvPr id="89" name="Google Shape;89;p17"/>
+          <p:cNvPr id="91" name="Google Shape;91;p17"/>
           <p:cNvSpPr txBox="1"/>
           <p:nvPr/>
         </p:nvSpPr>
@@ -21639,7 +21857,7 @@
       </p:sp>
       <p:sp>
         <p:nvSpPr>
-          <p:cNvPr id="90" name="Google Shape;90;p17"/>
+          <p:cNvPr id="92" name="Google Shape;92;p17"/>
           <p:cNvSpPr txBox="1"/>
           <p:nvPr/>
         </p:nvSpPr>
@@ -21875,7 +22093,7 @@
       </p:sp>
       <p:pic>
         <p:nvPicPr>
-          <p:cNvPr id="91" name="Google Shape;91;p17"/>
+          <p:cNvPr id="93" name="Google Shape;93;p17"/>
           <p:cNvPicPr preferRelativeResize="0"/>
           <p:nvPr/>
         </p:nvPicPr>
@@ -21914,7 +22132,7 @@
       </p:pic>
       <p:sp>
         <p:nvSpPr>
-          <p:cNvPr id="92" name="Google Shape;92;p17"/>
+          <p:cNvPr id="94" name="Google Shape;94;p17"/>
           <p:cNvSpPr txBox="1"/>
           <p:nvPr/>
         </p:nvSpPr>
@@ -22061,7 +22279,7 @@
       </p:sp>
       <p:pic>
         <p:nvPicPr>
-          <p:cNvPr id="93" name="Google Shape;93;p17"/>
+          <p:cNvPr id="95" name="Google Shape;95;p17"/>
           <p:cNvPicPr preferRelativeResize="0"/>
           <p:nvPr/>
         </p:nvPicPr>
@@ -22111,7 +22329,7 @@
   <p:cSld>
     <p:spTree>
       <p:nvGrpSpPr>
-        <p:cNvPr id="1" name="Shape 97"/>
+        <p:cNvPr id="1" name="Shape 99"/>
         <p:cNvGrpSpPr/>
         <p:nvPr/>
       </p:nvGrpSpPr>
@@ -22125,7 +22343,7 @@
       </p:grpSpPr>
       <p:sp>
         <p:nvSpPr>
-          <p:cNvPr id="98" name="Google Shape;98;p18"/>
+          <p:cNvPr id="100" name="Google Shape;100;p18"/>
           <p:cNvSpPr txBox="1"/>
           <p:nvPr/>
         </p:nvSpPr>
@@ -22191,7 +22409,7 @@
       </p:sp>
       <p:sp>
         <p:nvSpPr>
-          <p:cNvPr id="99" name="Google Shape;99;p18"/>
+          <p:cNvPr id="101" name="Google Shape;101;p18"/>
           <p:cNvSpPr txBox="1"/>
           <p:nvPr/>
         </p:nvSpPr>
@@ -22473,7 +22691,7 @@
       </p:sp>
       <p:sp>
         <p:nvSpPr>
-          <p:cNvPr id="100" name="Google Shape;100;p18"/>
+          <p:cNvPr id="102" name="Google Shape;102;p18"/>
           <p:cNvSpPr txBox="1"/>
           <p:nvPr/>
         </p:nvSpPr>
@@ -22564,7 +22782,7 @@
       </p:sp>
       <p:pic>
         <p:nvPicPr>
-          <p:cNvPr id="101" name="Google Shape;101;p18"/>
+          <p:cNvPr id="103" name="Google Shape;103;p18"/>
           <p:cNvPicPr preferRelativeResize="0"/>
           <p:nvPr/>
         </p:nvPicPr>
@@ -22608,7 +22826,7 @@
   <p:cSld>
     <p:spTree>
       <p:nvGrpSpPr>
-        <p:cNvPr id="1" name="Shape 105"/>
+        <p:cNvPr id="1" name="Shape 107"/>
         <p:cNvGrpSpPr/>
         <p:nvPr/>
       </p:nvGrpSpPr>
@@ -22622,7 +22840,7 @@
       </p:grpSpPr>
       <p:sp>
         <p:nvSpPr>
-          <p:cNvPr id="106" name="Google Shape;106;p19"/>
+          <p:cNvPr id="108" name="Google Shape;108;p19"/>
           <p:cNvSpPr txBox="1"/>
           <p:nvPr/>
         </p:nvSpPr>
@@ -22688,7 +22906,7 @@
       </p:sp>
       <p:sp>
         <p:nvSpPr>
-          <p:cNvPr id="107" name="Google Shape;107;p19"/>
+          <p:cNvPr id="109" name="Google Shape;109;p19"/>
           <p:cNvSpPr txBox="1"/>
           <p:nvPr/>
         </p:nvSpPr>
@@ -23019,7 +23237,7 @@
       </p:sp>
       <p:pic>
         <p:nvPicPr>
-          <p:cNvPr id="108" name="Google Shape;108;p19"/>
+          <p:cNvPr id="110" name="Google Shape;110;p19"/>
           <p:cNvPicPr preferRelativeResize="0"/>
           <p:nvPr/>
         </p:nvPicPr>
@@ -23052,7 +23270,7 @@
       </p:pic>
       <p:sp>
         <p:nvSpPr>
-          <p:cNvPr id="109" name="Google Shape;109;p19"/>
+          <p:cNvPr id="111" name="Google Shape;111;p19"/>
           <p:cNvSpPr txBox="1"/>
           <p:nvPr/>
         </p:nvSpPr>
@@ -23715,7 +23933,7 @@
   <p:cSld>
     <p:spTree>
       <p:nvGrpSpPr>
-        <p:cNvPr id="1" name="Shape 113"/>
+        <p:cNvPr id="1" name="Shape 115"/>
         <p:cNvGrpSpPr/>
         <p:nvPr/>
       </p:nvGrpSpPr>
@@ -23729,7 +23947,7 @@
       </p:grpSpPr>
       <p:sp>
         <p:nvSpPr>
-          <p:cNvPr id="114" name="Google Shape;114;p20"/>
+          <p:cNvPr id="116" name="Google Shape;116;p20"/>
           <p:cNvSpPr txBox="1"/>
           <p:nvPr/>
         </p:nvSpPr>
@@ -23795,7 +24013,7 @@
       </p:sp>
       <p:sp>
         <p:nvSpPr>
-          <p:cNvPr id="115" name="Google Shape;115;p20"/>
+          <p:cNvPr id="117" name="Google Shape;117;p20"/>
           <p:cNvSpPr txBox="1"/>
           <p:nvPr/>
         </p:nvSpPr>
@@ -24060,7 +24278,7 @@
       </p:sp>
       <p:sp>
         <p:nvSpPr>
-          <p:cNvPr id="116" name="Google Shape;116;p20"/>
+          <p:cNvPr id="118" name="Google Shape;118;p20"/>
           <p:cNvSpPr txBox="1"/>
           <p:nvPr/>
         </p:nvSpPr>
@@ -24180,7 +24398,7 @@
       </p:sp>
       <p:sp>
         <p:nvSpPr>
-          <p:cNvPr id="117" name="Google Shape;117;p20"/>
+          <p:cNvPr id="119" name="Google Shape;119;p20"/>
           <p:cNvSpPr txBox="1"/>
           <p:nvPr/>
         </p:nvSpPr>
@@ -24524,7 +24742,7 @@
       </p:sp>
       <p:sp>
         <p:nvSpPr>
-          <p:cNvPr id="118" name="Google Shape;118;p20"/>
+          <p:cNvPr id="120" name="Google Shape;120;p20"/>
           <p:cNvSpPr txBox="1"/>
           <p:nvPr/>
         </p:nvSpPr>
@@ -24650,7 +24868,7 @@
       </p:sp>
       <p:sp>
         <p:nvSpPr>
-          <p:cNvPr id="119" name="Google Shape;119;p20"/>
+          <p:cNvPr id="121" name="Google Shape;121;p20"/>
           <p:cNvSpPr txBox="1"/>
           <p:nvPr/>
         </p:nvSpPr>
@@ -24963,7 +25181,7 @@
       </p:sp>
       <p:sp>
         <p:nvSpPr>
-          <p:cNvPr id="120" name="Google Shape;120;p20"/>
+          <p:cNvPr id="122" name="Google Shape;122;p20"/>
           <p:cNvSpPr txBox="1"/>
           <p:nvPr/>
         </p:nvSpPr>
@@ -25245,7 +25463,7 @@
       </p:sp>
       <p:sp>
         <p:nvSpPr>
-          <p:cNvPr id="121" name="Google Shape;121;p20"/>
+          <p:cNvPr id="123" name="Google Shape;123;p20"/>
           <p:cNvSpPr txBox="1"/>
           <p:nvPr/>
         </p:nvSpPr>
@@ -25410,7 +25628,7 @@
   <p:cSld>
     <p:spTree>
       <p:nvGrpSpPr>
-        <p:cNvPr id="1" name="Shape 125"/>
+        <p:cNvPr id="1" name="Shape 127"/>
         <p:cNvGrpSpPr/>
         <p:nvPr/>
       </p:nvGrpSpPr>
@@ -25424,7 +25642,7 @@
       </p:grpSpPr>
       <p:sp>
         <p:nvSpPr>
-          <p:cNvPr id="126" name="Google Shape;126;p21"/>
+          <p:cNvPr id="128" name="Google Shape;128;p21"/>
           <p:cNvSpPr txBox="1"/>
           <p:nvPr/>
         </p:nvSpPr>
@@ -25490,7 +25708,7 @@
       </p:sp>
       <p:sp>
         <p:nvSpPr>
-          <p:cNvPr id="127" name="Google Shape;127;p21"/>
+          <p:cNvPr id="129" name="Google Shape;129;p21"/>
           <p:cNvSpPr txBox="1"/>
           <p:nvPr/>
         </p:nvSpPr>
@@ -25691,7 +25909,7 @@
       </p:sp>
       <p:sp>
         <p:nvSpPr>
-          <p:cNvPr id="128" name="Google Shape;128;p21"/>
+          <p:cNvPr id="130" name="Google Shape;130;p21"/>
           <p:cNvSpPr txBox="1"/>
           <p:nvPr/>
         </p:nvSpPr>
@@ -25831,7 +26049,7 @@
       </p:sp>
       <p:sp>
         <p:nvSpPr>
-          <p:cNvPr id="129" name="Google Shape;129;p21"/>
+          <p:cNvPr id="131" name="Google Shape;131;p21"/>
           <p:cNvSpPr txBox="1"/>
           <p:nvPr/>
         </p:nvSpPr>
@@ -25925,7 +26143,7 @@
       </p:sp>
       <p:pic>
         <p:nvPicPr>
-          <p:cNvPr id="130" name="Google Shape;130;p21"/>
+          <p:cNvPr id="132" name="Google Shape;132;p21"/>
           <p:cNvPicPr preferRelativeResize="0"/>
           <p:nvPr/>
         </p:nvPicPr>
@@ -25964,7 +26182,7 @@
       </p:pic>
       <p:sp>
         <p:nvSpPr>
-          <p:cNvPr id="131" name="Google Shape;131;p21"/>
+          <p:cNvPr id="133" name="Google Shape;133;p21"/>
           <p:cNvSpPr txBox="1"/>
           <p:nvPr/>
         </p:nvSpPr>
@@ -26141,7 +26359,7 @@
       </p:sp>
       <p:pic>
         <p:nvPicPr>
-          <p:cNvPr id="132" name="Google Shape;132;p21"/>
+          <p:cNvPr id="134" name="Google Shape;134;p21"/>
           <p:cNvPicPr preferRelativeResize="0"/>
           <p:nvPr/>
         </p:nvPicPr>
@@ -26174,7 +26392,7 @@
       </p:pic>
       <p:sp>
         <p:nvSpPr>
-          <p:cNvPr id="133" name="Google Shape;133;p21"/>
+          <p:cNvPr id="135" name="Google Shape;135;p21"/>
           <p:cNvSpPr txBox="1"/>
           <p:nvPr/>
         </p:nvSpPr>
@@ -26226,7 +26444,7 @@
       </p:sp>
       <p:sp>
         <p:nvSpPr>
-          <p:cNvPr id="134" name="Google Shape;134;p21"/>
+          <p:cNvPr id="136" name="Google Shape;136;p21"/>
           <p:cNvSpPr txBox="1"/>
           <p:nvPr/>
         </p:nvSpPr>
@@ -26278,7 +26496,7 @@
       </p:sp>
       <p:sp>
         <p:nvSpPr>
-          <p:cNvPr id="135" name="Google Shape;135;p21"/>
+          <p:cNvPr id="137" name="Google Shape;137;p21"/>
           <p:cNvSpPr txBox="1"/>
           <p:nvPr/>
         </p:nvSpPr>
